--- a/docs/presentation/lc26-apex-cursors.pptx
+++ b/docs/presentation/lc26-apex-cursors.pptx
@@ -15024,7 +15024,7 @@
           </a:effectLst>
         </p:spPr>
         <p:txBody>
-          <a:bodyPr anchorCtr="0" anchor="t" bIns="160000" lIns="72000" rIns="72000" tIns="55000" wrap="square">
+          <a:bodyPr anchorCtr="0" anchor="t" bIns="160000" lIns="72000" rIns="72000" tIns="55000" wrap="none" horzOverflow="clip" vertOverflow="clip">
             <a:noAutofit/>
           </a:bodyPr>
           <a:lstStyle/>
@@ -15294,7 +15294,7 @@
           </a:effectLst>
         </p:spPr>
         <p:txBody>
-          <a:bodyPr anchorCtr="0" anchor="t" bIns="160000" lIns="72000" rIns="72000" tIns="55000" wrap="square">
+          <a:bodyPr anchorCtr="0" anchor="t" bIns="160000" lIns="72000" rIns="72000" tIns="55000" wrap="none" horzOverflow="clip" vertOverflow="clip">
             <a:noAutofit/>
           </a:bodyPr>
           <a:lstStyle/>
@@ -15340,7 +15340,15 @@
                   <a:srgbClr val="569CD6"/>
                 </a:solidFill>
               </a:rPr>
-              <a:t>for (Order row :</a:t>
+              <a:t>Integer </a:t>
+            </a:r>
+            <a:r>
+              <a:rPr lang="en-US" sz="1500" typeface="Consolas">
+                <a:solidFill>
+                  <a:srgbClr val="D4D4D4"/>
+                </a:solidFill>
+              </a:rPr>
+              <a:t>rowCalloutsRequired =</a:t>
             </a:r>
             <a:endParaRPr/>
           </a:p>
@@ -15360,10 +15368,26 @@
             <a:r>
               <a:rPr lang="en-US" sz="1500" typeface="Consolas">
                 <a:solidFill>
+                  <a:srgbClr val="D4D4D4"/>
+                </a:solidFill>
+              </a:rPr>
+              <a:t>   </a:t>
+            </a:r>
+            <a:r>
+              <a:rPr lang="en-US" sz="1500" typeface="Consolas">
+                <a:solidFill>
                   <a:srgbClr val="DCDCAA"/>
                 </a:solidFill>
               </a:rPr>
-              <a:t>  cursor.fetch(pos,</a:t>
+              <a:t>rowCalloutsFor</a:t>
+            </a:r>
+            <a:r>
+              <a:rPr lang="en-US" sz="1500" typeface="Consolas">
+                <a:solidFill>
+                  <a:srgbClr val="CE9178"/>
+                </a:solidFill>
+              </a:rPr>
+              <a:t>(row);</a:t>
             </a:r>
             <a:endParaRPr/>
           </a:p>
@@ -15383,10 +15407,57 @@
             <a:r>
               <a:rPr lang="en-US" sz="1500" typeface="Consolas">
                 <a:solidFill>
+                  <a:srgbClr val="569CD6"/>
+                </a:solidFill>
+              </a:rPr>
+              <a:t>Boolean </a:t>
+            </a:r>
+            <a:r>
+              <a:rPr lang="en-US" sz="1500" typeface="Consolas">
+                <a:solidFill>
+                  <a:srgbClr val="D4D4D4"/>
+                </a:solidFill>
+              </a:rPr>
+              <a:t>canProcessRow =</a:t>
+            </a:r>
+            <a:endParaRPr/>
+          </a:p>
+          <a:p>
+            <a:pPr indent="0" lvl="0" marL="0" rtl="0" algn="l">
+              <a:lnSpc>
+                <a:spcPct val="100000"/>
+              </a:lnSpc>
+              <a:spcBef>
+                <a:spcPts val="40"/>
+              </a:spcBef>
+              <a:spcAft>
+                <a:spcPts val="0"/>
+              </a:spcAft>
+              <a:buNone/>
+            </a:pPr>
+            <a:r>
+              <a:rPr lang="en-US" sz="1500" typeface="Consolas">
+                <a:solidFill>
+                  <a:srgbClr val="D4D4D4"/>
+                </a:solidFill>
+              </a:rPr>
+              <a:t>   rowCalloutsRequired == </a:t>
+            </a:r>
+            <a:r>
+              <a:rPr lang="en-US" sz="1500" typeface="Consolas">
+                <a:solidFill>
                   <a:srgbClr val="CE9178"/>
                 </a:solidFill>
               </a:rPr>
-              <a:t>    batchSize)) {</a:t>
+              <a:t>0</a:t>
+            </a:r>
+            <a:r>
+              <a:rPr lang="en-US" sz="1500" typeface="Consolas">
+                <a:solidFill>
+                  <a:srgbClr val="D4D4D4"/>
+                </a:solidFill>
+              </a:rPr>
+              <a:t> ||</a:t>
             </a:r>
             <a:endParaRPr/>
           </a:p>
@@ -15409,7 +15480,23 @@
                   <a:srgbClr val="D4D4D4"/>
                 </a:solidFill>
               </a:rPr>
-              <a:t>  rowCallouts =</a:t>
+              <a:t>       scope.</a:t>
+            </a:r>
+            <a:r>
+              <a:rPr lang="en-US" sz="1500" typeface="Consolas">
+                <a:solidFill>
+                  <a:srgbClr val="D4D4D4"/>
+                </a:solidFill>
+              </a:rPr>
+              <a:t>predictedCallouts</a:t>
+            </a:r>
+            <a:r>
+              <a:rPr lang="en-US" sz="1500" typeface="Consolas">
+                <a:solidFill>
+                  <a:srgbClr val="D4D4D4"/>
+                </a:solidFill>
+              </a:rPr>
+              <a:t> +</a:t>
             </a:r>
             <a:endParaRPr/>
           </a:p>
@@ -15422,40 +15509,25 @@
                 <a:spcPts val="40"/>
               </a:spcBef>
               <a:spcAft>
-                <a:spcPts val="0"/>
+                <a:spcPts val="160"/>
               </a:spcAft>
               <a:buNone/>
             </a:pPr>
             <a:r>
               <a:rPr lang="en-US" sz="1500" typeface="Consolas">
                 <a:solidFill>
-                  <a:srgbClr val="DCDCAA"/>
+                  <a:srgbClr val="D4D4D4"/>
                 </a:solidFill>
               </a:rPr>
-              <a:t>    rowCalloutsFor(row);</a:t>
-            </a:r>
-            <a:endParaRPr/>
-          </a:p>
-          <a:p>
-            <a:pPr indent="0" lvl="0" marL="0" rtl="0" algn="l">
-              <a:lnSpc>
-                <a:spcPct val="100000"/>
-              </a:lnSpc>
-              <a:spcBef>
-                <a:spcPts val="40"/>
-              </a:spcBef>
-              <a:spcAft>
-                <a:spcPts val="160"/>
-              </a:spcAft>
-              <a:buNone/>
-            </a:pPr>
+              <a:t>      rowCalloutsRequired &lt;= </a:t>
+            </a:r>
             <a:r>
               <a:rPr lang="en-US" sz="1500" typeface="Consolas">
                 <a:solidFill>
-                  <a:srgbClr val="6A9955"/>
+                  <a:srgbClr val="D4D4D4"/>
                 </a:solidFill>
               </a:rPr>
-              <a:t>  // pack to callout budget</a:t>
+              <a:t>calloutBudget;</a:t>
             </a:r>
             <a:endParaRPr/>
           </a:p>
@@ -15541,7 +15613,7 @@
           </a:effectLst>
         </p:spPr>
         <p:txBody>
-          <a:bodyPr anchorCtr="0" anchor="t" bIns="160000" lIns="72000" rIns="72000" tIns="55000" wrap="square">
+          <a:bodyPr anchorCtr="0" anchor="t" bIns="160000" lIns="72000" rIns="72000" tIns="55000" wrap="none" horzOverflow="clip" vertOverflow="clip">
             <a:noAutofit/>
           </a:bodyPr>
           <a:lstStyle/>
@@ -15587,7 +15659,31 @@
                   <a:srgbClr val="569CD6"/>
                 </a:solidFill>
               </a:rPr>
-              <a:t>if (moreOrders) {</a:t>
+              <a:t>if (</a:t>
+            </a:r>
+            <a:r>
+              <a:rPr lang="en-US" sz="1500" typeface="Consolas">
+                <a:solidFill>
+                  <a:srgbClr val="569CD6"/>
+                </a:solidFill>
+              </a:rPr>
+              <a:t>Limits</a:t>
+            </a:r>
+            <a:r>
+              <a:rPr lang="en-US" sz="1500" typeface="Consolas">
+                <a:solidFill>
+                  <a:srgbClr val="DCDCAA"/>
+                </a:solidFill>
+              </a:rPr>
+              <a:t>.getFetchCallsOnApexCursor</a:t>
+            </a:r>
+            <a:r>
+              <a:rPr lang="en-US" sz="1500" typeface="Consolas">
+                <a:solidFill>
+                  <a:srgbClr val="D4D4D4"/>
+                </a:solidFill>
+              </a:rPr>
+              <a:t>() &gt;= </a:t>
             </a:r>
             <a:endParaRPr/>
           </a:p>
@@ -15607,10 +15703,34 @@
             <a:r>
               <a:rPr lang="en-US" sz="1500" typeface="Consolas">
                 <a:solidFill>
+                  <a:srgbClr val="D4D4D4"/>
+                </a:solidFill>
+              </a:rPr>
+              <a:t>    </a:t>
+            </a:r>
+            <a:r>
+              <a:rPr lang="en-US" sz="1500" typeface="Consolas">
+                <a:solidFill>
+                  <a:srgbClr val="569CD6"/>
+                </a:solidFill>
+              </a:rPr>
+              <a:t>Limits</a:t>
+            </a:r>
+            <a:r>
+              <a:rPr lang="en-US" sz="1500" typeface="Consolas">
+                <a:solidFill>
                   <a:srgbClr val="DCDCAA"/>
                 </a:solidFill>
               </a:rPr>
-              <a:t>  sequence++;</a:t>
+              <a:t>.getLimitFetchCallsOnApexCursor</a:t>
+            </a:r>
+            <a:r>
+              <a:rPr lang="en-US" sz="1500" typeface="Consolas">
+                <a:solidFill>
+                  <a:srgbClr val="D4D4D4"/>
+                </a:solidFill>
+              </a:rPr>
+              <a:t>()) {</a:t>
             </a:r>
             <a:endParaRPr/>
           </a:p>
@@ -15630,10 +15750,26 @@
             <a:r>
               <a:rPr lang="en-US" sz="1500" typeface="Consolas">
                 <a:solidFill>
-                  <a:srgbClr val="DCDCAA"/>
+                  <a:srgbClr val="D4D4D4"/>
                 </a:solidFill>
               </a:rPr>
-              <a:t>  System.enqueueJob(this);</a:t>
+              <a:t>     </a:t>
+            </a:r>
+            <a:r>
+              <a:rPr lang="en-US" sz="1500" typeface="Consolas">
+                <a:solidFill>
+                  <a:srgbClr val="569CD6"/>
+                </a:solidFill>
+              </a:rPr>
+              <a:t>return</a:t>
+            </a:r>
+            <a:r>
+              <a:rPr lang="en-US" sz="1500" typeface="Consolas">
+                <a:solidFill>
+                  <a:srgbClr val="D4D4D4"/>
+                </a:solidFill>
+              </a:rPr>
+              <a:t> scope;</a:t>
             </a:r>
             <a:endParaRPr/>
           </a:p>
@@ -15646,40 +15782,17 @@
                 <a:spcPts val="40"/>
               </a:spcBef>
               <a:spcAft>
-                <a:spcPts val="0"/>
+                <a:spcPts val="160"/>
               </a:spcAft>
               <a:buNone/>
             </a:pPr>
             <a:r>
               <a:rPr lang="en-US" sz="1500" typeface="Consolas">
                 <a:solidFill>
-                  <a:srgbClr val="569CD6"/>
+                  <a:srgbClr val="D4D4D4"/>
                 </a:solidFill>
               </a:rPr>
               <a:t>}</a:t>
-            </a:r>
-            <a:endParaRPr/>
-          </a:p>
-          <a:p>
-            <a:pPr indent="0" lvl="0" marL="0" rtl="0" algn="l">
-              <a:lnSpc>
-                <a:spcPct val="100000"/>
-              </a:lnSpc>
-              <a:spcBef>
-                <a:spcPts val="40"/>
-              </a:spcBef>
-              <a:spcAft>
-                <a:spcPts val="160"/>
-              </a:spcAft>
-              <a:buNone/>
-            </a:pPr>
-            <a:r>
-              <a:rPr lang="en-US" sz="1500" typeface="Consolas">
-                <a:solidFill>
-                  <a:srgbClr val="DCDCAA"/>
-                </a:solidFill>
-              </a:rPr>
-              <a:t>System.attachFinalizer(this);</a:t>
             </a:r>
             <a:endParaRPr/>
           </a:p>
@@ -15834,7 +15947,7 @@
             </a:pPr>
             <a:r>
               <a:rPr lang="en-US" sz="1800"/>
-              <a:t>Finalizer publishes platform events after each chunk commits</a:t>
+              <a:t>Track fetch limits dynamically via Limits.getFetchCallsOnApexCursor</a:t>
             </a:r>
             <a:endParaRPr/>
           </a:p>
@@ -15857,7 +15970,7 @@
             </a:pPr>
             <a:r>
               <a:rPr lang="en-US" sz="1800"/>
-              <a:t>Cursor position travels on the job — no Database.Stateful required</a:t>
+              <a:t>Cursor position travels on the job state</a:t>
             </a:r>
             <a:endParaRPr/>
           </a:p>
@@ -16261,7 +16374,7 @@
                   <a:srgbClr val="891019"/>
                 </a:solidFill>
               </a:rPr>
-              <a:t>Guard fetch size</a:t>
+              <a:t>Guard number of records</a:t>
             </a:r>
             <a:endParaRPr/>
           </a:p>
@@ -16341,10 +16454,34 @@
             <a:r>
               <a:rPr lang="en-US" sz="1150" typeface="Consolas">
                 <a:solidFill>
+                  <a:srgbClr val="DCDCAA"/>
+                </a:solidFill>
+              </a:rPr>
+              <a:t>if (cursor.getNumRecords()</a:t>
+            </a:r>
+            <a:r>
+              <a:rPr lang="en-US" sz="1150" typeface="Consolas">
+                <a:solidFill>
                   <a:srgbClr val="D4D4D4"/>
                 </a:solidFill>
               </a:rPr>
-              <a:t>remaining = c.getNumRecords()</a:t>
+              <a:t> == </a:t>
+            </a:r>
+            <a:r>
+              <a:rPr lang="en-US" sz="1150" typeface="Consolas">
+                <a:solidFill>
+                  <a:srgbClr val="CE9178"/>
+                </a:solidFill>
+              </a:rPr>
+              <a:t>0</a:t>
+            </a:r>
+            <a:r>
+              <a:rPr lang="en-US" sz="1150" typeface="Consolas">
+                <a:solidFill>
+                  <a:srgbClr val="D4D4D4"/>
+                </a:solidFill>
+              </a:rPr>
+              <a:t>) {</a:t>
             </a:r>
             <a:endParaRPr/>
           </a:p>
@@ -16364,10 +16501,26 @@
             <a:r>
               <a:rPr lang="en-US" sz="1150" typeface="Consolas">
                 <a:solidFill>
-                  <a:srgbClr val="DCDCAA"/>
+                  <a:srgbClr val="D4D4D4"/>
                 </a:solidFill>
               </a:rPr>
-              <a:t>  - offset;</a:t>
+              <a:t>  </a:t>
+            </a:r>
+            <a:r>
+              <a:rPr lang="en-US" sz="1150" typeface="Consolas">
+                <a:solidFill>
+                  <a:srgbClr val="569CD6"/>
+                </a:solidFill>
+              </a:rPr>
+              <a:t>return</a:t>
+            </a:r>
+            <a:r>
+              <a:rPr lang="en-US" sz="1150" typeface="Consolas">
+                <a:solidFill>
+                  <a:srgbClr val="D4D4D4"/>
+                </a:solidFill>
+              </a:rPr>
+              <a:t> result;</a:t>
             </a:r>
             <a:endParaRPr/>
           </a:p>
@@ -16380,7 +16533,7 @@
                 <a:spcPts val="35"/>
               </a:spcBef>
               <a:spcAft>
-                <a:spcPts val="0"/>
+                <a:spcPts val="120"/>
               </a:spcAft>
               <a:buNone/>
             </a:pPr>
@@ -16390,53 +16543,7 @@
                   <a:srgbClr val="D4D4D4"/>
                 </a:solidFill>
               </a:rPr>
-              <a:t>fetchSize = remaining &gt; 0</a:t>
-            </a:r>
-            <a:endParaRPr/>
-          </a:p>
-          <a:p>
-            <a:pPr indent="0" lvl="0" marL="0" rtl="0" algn="l">
-              <a:lnSpc>
-                <a:spcPct val="98000"/>
-              </a:lnSpc>
-              <a:spcBef>
-                <a:spcPts val="35"/>
-              </a:spcBef>
-              <a:spcAft>
-                <a:spcPts val="0"/>
-              </a:spcAft>
-              <a:buNone/>
-            </a:pPr>
-            <a:r>
-              <a:rPr lang="en-US" sz="1150" typeface="Consolas">
-                <a:solidFill>
-                  <a:srgbClr val="DCDCAA"/>
-                </a:solidFill>
-              </a:rPr>
-              <a:t>  ? Math.min(batchSize,</a:t>
-            </a:r>
-            <a:endParaRPr/>
-          </a:p>
-          <a:p>
-            <a:pPr indent="0" lvl="0" marL="0" rtl="0" algn="l">
-              <a:lnSpc>
-                <a:spcPct val="98000"/>
-              </a:lnSpc>
-              <a:spcBef>
-                <a:spcPts val="35"/>
-              </a:spcBef>
-              <a:spcAft>
-                <a:spcPts val="120"/>
-              </a:spcAft>
-              <a:buNone/>
-            </a:pPr>
-            <a:r>
-              <a:rPr lang="en-US" sz="1150" typeface="Consolas">
-                <a:solidFill>
-                  <a:srgbClr val="CE9178"/>
-                </a:solidFill>
-              </a:rPr>
-              <a:t>      remaining) : 0;</a:t>
+              <a:t>}</a:t>
             </a:r>
             <a:endParaRPr/>
           </a:p>
@@ -16496,7 +16603,7 @@
                   <a:srgbClr val="444444"/>
                 </a:solidFill>
               </a:rPr>
-              <a:t>Skip fetch when remaining is zero.</a:t>
+              <a:t>Exit early when the result set is empty.</a:t>
             </a:r>
             <a:endParaRPr/>
           </a:p>
@@ -16519,7 +16626,7 @@
                   <a:srgbClr val="444444"/>
                 </a:solidFill>
               </a:rPr>
-              <a:t>Avoids empty fetch(0, 0) batches.</a:t>
+              <a:t>fetch(0, 0) can throw a GACK.</a:t>
             </a:r>
             <a:endParaRPr/>
           </a:p>
@@ -16817,7 +16924,7 @@
                   <a:srgbClr val="444444"/>
                 </a:solidFill>
               </a:rPr>
-              <a:t>Critical for partial last pages and after deletes.</a:t>
+              <a:t>Critical for partial last pages.</a:t>
             </a:r>
             <a:endParaRPr/>
           </a:p>
@@ -17413,7 +17520,7 @@
                   <a:srgbClr val="444444"/>
                 </a:solidFill>
               </a:rPr>
-              <a:t>Return on @AuraEnabled result — no JSON hack.</a:t>
+              <a:t>Return on @AuraEnabled result.</a:t>
             </a:r>
             <a:endParaRPr/>
           </a:p>
@@ -17453,7 +17560,7 @@
                   <a:srgbClr val="891019"/>
                 </a:solidFill>
               </a:rPr>
-              <a:t>Surface limits in UI</a:t>
+              <a:t>Check for latest security changes</a:t>
             </a:r>
             <a:endParaRPr/>
           </a:p>
@@ -17533,10 +17640,79 @@
             <a:r>
               <a:rPr lang="en-US" sz="1150" typeface="Consolas">
                 <a:solidFill>
+                  <a:srgbClr val="CE9178"/>
+                </a:solidFill>
+              </a:rPr>
+              <a:t>[SELECT Id FROM Account</a:t>
+            </a:r>
+            <a:endParaRPr/>
+          </a:p>
+          <a:p>
+            <a:pPr indent="0" lvl="0" marL="0" rtl="0" algn="l">
+              <a:lnSpc>
+                <a:spcPct val="98000"/>
+              </a:lnSpc>
+              <a:spcBef>
+                <a:spcPts val="35"/>
+              </a:spcBef>
+              <a:spcAft>
+                <a:spcPts val="0"/>
+              </a:spcAft>
+              <a:buNone/>
+            </a:pPr>
+            <a:r>
+              <a:rPr lang="en-US" sz="1150" typeface="Consolas">
+                <a:solidFill>
+                  <a:srgbClr val="CE9178"/>
+                </a:solidFill>
+              </a:rPr>
+              <a:t>  WHERE Id IN :ids</a:t>
+            </a:r>
+            <a:endParaRPr/>
+          </a:p>
+          <a:p>
+            <a:pPr indent="0" lvl="0" marL="0" rtl="0" algn="l">
+              <a:lnSpc>
+                <a:spcPct val="98000"/>
+              </a:lnSpc>
+              <a:spcBef>
+                <a:spcPts val="35"/>
+              </a:spcBef>
+              <a:spcAft>
+                <a:spcPts val="0"/>
+              </a:spcAft>
+              <a:buNone/>
+            </a:pPr>
+            <a:r>
+              <a:rPr lang="en-US" sz="1150" typeface="Consolas">
+                <a:solidFill>
+                  <a:srgbClr val="CE9178"/>
+                </a:solidFill>
+              </a:rPr>
+              <a:t>  WITH USER_MODE];</a:t>
+            </a:r>
+            <a:endParaRPr/>
+          </a:p>
+          <a:p>
+            <a:pPr indent="0" lvl="0" marL="0" rtl="0" algn="l">
+              <a:lnSpc>
+                <a:spcPct val="98000"/>
+              </a:lnSpc>
+              <a:spcBef>
+                <a:spcPts val="35"/>
+              </a:spcBef>
+              <a:spcAft>
+                <a:spcPts val="0"/>
+              </a:spcAft>
+              <a:buNone/>
+            </a:pPr>
+            <a:r>
+              <a:rPr lang="en-US" sz="1150" typeface="Consolas">
+                <a:solidFill>
                   <a:srgbClr val="DCDCAA"/>
                 </a:solidFill>
               </a:rPr>
-              <a:t>Limits.getApexCursors()</a:t>
+              <a:t>cursor = Database.getCursor(</a:t>
             </a:r>
             <a:endParaRPr/>
           </a:p>
@@ -17549,86 +17725,17 @@
                 <a:spcPts val="35"/>
               </a:spcBef>
               <a:spcAft>
-                <a:spcPts val="0"/>
+                <a:spcPts val="120"/>
               </a:spcAft>
               <a:buNone/>
             </a:pPr>
             <a:r>
               <a:rPr lang="en-US" sz="1150" typeface="Consolas">
                 <a:solidFill>
-                  <a:srgbClr val="D4D4D4"/>
+                  <a:srgbClr val="CE9178"/>
                 </a:solidFill>
               </a:rPr>
-              <a:t>  + '/' + Limits</a:t>
-            </a:r>
-            <a:endParaRPr/>
-          </a:p>
-          <a:p>
-            <a:pPr indent="0" lvl="0" marL="0" rtl="0" algn="l">
-              <a:lnSpc>
-                <a:spcPct val="98000"/>
-              </a:lnSpc>
-              <a:spcBef>
-                <a:spcPts val="35"/>
-              </a:spcBef>
-              <a:spcAft>
-                <a:spcPts val="0"/>
-              </a:spcAft>
-              <a:buNone/>
-            </a:pPr>
-            <a:r>
-              <a:rPr lang="en-US" sz="1150" typeface="Consolas">
-                <a:solidFill>
-                  <a:srgbClr val="DCDCAA"/>
-                </a:solidFill>
-              </a:rPr>
-              <a:t>  .getLimitApexCursors();</a:t>
-            </a:r>
-            <a:endParaRPr/>
-          </a:p>
-          <a:p>
-            <a:pPr indent="0" lvl="0" marL="0" rtl="0" algn="l">
-              <a:lnSpc>
-                <a:spcPct val="98000"/>
-              </a:lnSpc>
-              <a:spcBef>
-                <a:spcPts val="35"/>
-              </a:spcBef>
-              <a:spcAft>
-                <a:spcPts val="0"/>
-              </a:spcAft>
-              <a:buNone/>
-            </a:pPr>
-            <a:r>
-              <a:rPr lang="en-US" sz="1150" typeface="Consolas">
-                <a:solidFill>
-                  <a:srgbClr val="DCDCAA"/>
-                </a:solidFill>
-              </a:rPr>
-              <a:t>OrgLimits.getMap().get(</a:t>
-            </a:r>
-            <a:endParaRPr/>
-          </a:p>
-          <a:p>
-            <a:pPr indent="0" lvl="0" marL="0" rtl="0" algn="l">
-              <a:lnSpc>
-                <a:spcPct val="98000"/>
-              </a:lnSpc>
-              <a:spcBef>
-                <a:spcPts val="35"/>
-              </a:spcBef>
-              <a:spcAft>
-                <a:spcPts val="120"/>
-              </a:spcAft>
-              <a:buNone/>
-            </a:pPr>
-            <a:r>
-              <a:rPr lang="en-US" sz="1150" typeface="Consolas">
-                <a:solidFill>
-                  <a:srgbClr val="CE9178"/>
-                </a:solidFill>
-              </a:rPr>
-              <a:t>  'DailyApexCursorLimit');</a:t>
+              <a:t>  soql, AccessLevel.USER_MODE);</a:t>
             </a:r>
             <a:endParaRPr/>
           </a:p>
@@ -17678,7 +17785,7 @@
                 <a:spcPts val="180"/>
               </a:spcBef>
               <a:spcAft>
-                <a:spcPts val="0"/>
+                <a:spcPts val="80"/>
               </a:spcAft>
               <a:buNone/>
             </a:pPr>
@@ -17688,30 +17795,7 @@
                   <a:srgbClr val="444444"/>
                 </a:solidFill>
               </a:rPr>
-              <a:t>Limits.* for per-transaction governors.</a:t>
-            </a:r>
-            <a:endParaRPr/>
-          </a:p>
-          <a:p>
-            <a:pPr indent="0" lvl="0" marL="0" rtl="0" algn="l">
-              <a:lnSpc>
-                <a:spcPct val="108000"/>
-              </a:lnSpc>
-              <a:spcBef>
-                <a:spcPts val="100"/>
-              </a:spcBef>
-              <a:spcAft>
-                <a:spcPts val="80"/>
-              </a:spcAft>
-              <a:buNone/>
-            </a:pPr>
-            <a:r>
-              <a:rPr lang="en-US" sz="1280">
-                <a:solidFill>
-                  <a:srgbClr val="444444"/>
-                </a:solidFill>
-              </a:rPr>
-              <a:t>OrgLimits.getMap() for rolling 24-hour org caps.</a:t>
+              <a:t>Fetch does not re-evaluate security, per Batch Apex. If critical requery changes.</a:t>
             </a:r>
             <a:endParaRPr/>
           </a:p>
@@ -19955,13 +20039,13 @@
       </p:grpSpPr>
       <p:sp>
         <p:nvSpPr>
-          <p:cNvPr id="201" name="tip-card-bg-201"/>
+          <p:cNvPr id="201" name="usecase-card-bg-201"/>
           <p:cNvSpPr/>
           <p:nvPr/>
         </p:nvSpPr>
         <p:spPr>
           <a:xfrm>
-            <a:off x="338325" y="2116500"/>
+            <a:off x="338325" y="2741500"/>
             <a:ext cx="5662450" cy="1120000"/>
           </a:xfrm>
           <a:prstGeom prst="roundRect">
@@ -19993,13 +20077,13 @@
       </p:sp>
       <p:sp>
         <p:nvSpPr>
-          <p:cNvPr id="202" name="tip-emoji-202"/>
+          <p:cNvPr id="202" name="usecase-emoji-202"/>
           <p:cNvSpPr txBox="1"/>
           <p:nvPr/>
         </p:nvSpPr>
         <p:spPr>
           <a:xfrm>
-            <a:off x="428325" y="2506500"/>
+            <a:off x="428325" y="3131500"/>
             <a:ext cx="340000" cy="340000"/>
           </a:xfrm>
           <a:prstGeom prst="rect">
@@ -20021,7 +20105,7 @@
             </a:pPr>
             <a:r>
               <a:rPr lang="en-US" sz="3200"/>
-              <a:t>🔍</a:t>
+              <a:t>☑️</a:t>
             </a:r>
             <a:endParaRPr/>
           </a:p>
@@ -20029,13 +20113,13 @@
       </p:sp>
       <p:sp>
         <p:nvSpPr>
-          <p:cNvPr id="203" name="tip-content-203"/>
+          <p:cNvPr id="203" name="usecase-content-203"/>
           <p:cNvSpPr txBox="1"/>
           <p:nvPr/>
         </p:nvSpPr>
         <p:spPr>
           <a:xfrm>
-            <a:off x="858325" y="2201500"/>
+            <a:off x="858325" y="2826500"/>
             <a:ext cx="5057450" cy="950000"/>
           </a:xfrm>
           <a:prstGeom prst="rect">
@@ -20070,7 +20154,7 @@
                   <a:srgbClr val="4A6FA5"/>
                 </a:solidFill>
               </a:rPr>
-              <a:t>Instrument limits first</a:t>
+              <a:t>Records to Process Adjustment</a:t>
             </a:r>
             <a:endParaRPr/>
           </a:p>
@@ -20093,7 +20177,7 @@
                   <a:srgbClr val="444444"/>
                 </a:solidFill>
               </a:rPr>
-              <a:t>Show cursor, fetch, and row limits in the UI before users hit governor walls.</a:t>
+              <a:t>Present records to process and let users deselect rows. Pass the cursor and row indexes to ignore into the job.</a:t>
             </a:r>
             <a:endParaRPr/>
           </a:p>
@@ -20101,13 +20185,13 @@
       </p:sp>
       <p:sp>
         <p:nvSpPr>
-          <p:cNvPr id="204" name="tip-card-bg-204"/>
+          <p:cNvPr id="204" name="usecase-card-bg-204"/>
           <p:cNvSpPr/>
           <p:nvPr/>
         </p:nvSpPr>
         <p:spPr>
           <a:xfrm>
-            <a:off x="6160775" y="2116500"/>
+            <a:off x="6160775" y="2741500"/>
             <a:ext cx="5662450" cy="1120000"/>
           </a:xfrm>
           <a:prstGeom prst="roundRect">
@@ -20139,13 +20223,13 @@
       </p:sp>
       <p:sp>
         <p:nvSpPr>
-          <p:cNvPr id="205" name="tip-emoji-205"/>
+          <p:cNvPr id="205" name="usecase-emoji-205"/>
           <p:cNvSpPr txBox="1"/>
           <p:nvPr/>
         </p:nvSpPr>
         <p:spPr>
           <a:xfrm>
-            <a:off x="6250775" y="2506500"/>
+            <a:off x="6250775" y="3131500"/>
             <a:ext cx="340000" cy="340000"/>
           </a:xfrm>
           <a:prstGeom prst="rect">
@@ -20167,7 +20251,7 @@
             </a:pPr>
             <a:r>
               <a:rPr lang="en-US" sz="3200"/>
-              <a:t>📦</a:t>
+              <a:t>🔁</a:t>
             </a:r>
             <a:endParaRPr/>
           </a:p>
@@ -20175,13 +20259,13 @@
       </p:sp>
       <p:sp>
         <p:nvSpPr>
-          <p:cNvPr id="206" name="tip-content-206"/>
+          <p:cNvPr id="206" name="usecase-content-206"/>
           <p:cNvSpPr txBox="1"/>
           <p:nvPr/>
         </p:nvSpPr>
         <p:spPr>
           <a:xfrm>
-            <a:off x="6680775" y="2201500"/>
+            <a:off x="6680775" y="2826500"/>
             <a:ext cx="5057450" cy="950000"/>
           </a:xfrm>
           <a:prstGeom prst="rect">
@@ -20216,7 +20300,7 @@
                   <a:srgbClr val="5A7A3A"/>
                 </a:solidFill>
               </a:rPr>
-              <a:t>Session cache vs LWC state</a:t>
+              <a:t>Repeatable Datasets</a:t>
             </a:r>
             <a:endParaRPr/>
           </a:p>
@@ -20239,7 +20323,7 @@
                   <a:srgbClr val="444444"/>
                 </a:solidFill>
               </a:rPr>
-              <a:t>Cache.Session survives Apex calls; LWC-held cursor avoids server-side state.</a:t>
+              <a:t>Retry processing against the exact original record set.</a:t>
             </a:r>
             <a:endParaRPr/>
           </a:p>
@@ -20247,13 +20331,13 @@
       </p:sp>
       <p:sp>
         <p:nvSpPr>
-          <p:cNvPr id="207" name="tip-card-bg-207"/>
+          <p:cNvPr id="207" name="usecase-card-bg-207"/>
           <p:cNvSpPr/>
           <p:nvPr/>
         </p:nvSpPr>
         <p:spPr>
           <a:xfrm>
-            <a:off x="338325" y="3366500"/>
+            <a:off x="338325" y="3991500"/>
             <a:ext cx="5662450" cy="1120000"/>
           </a:xfrm>
           <a:prstGeom prst="roundRect">
@@ -20285,13 +20369,13 @@
       </p:sp>
       <p:sp>
         <p:nvSpPr>
-          <p:cNvPr id="208" name="tip-emoji-208"/>
+          <p:cNvPr id="208" name="usecase-emoji-208"/>
           <p:cNvSpPr txBox="1"/>
           <p:nvPr/>
         </p:nvSpPr>
         <p:spPr>
           <a:xfrm>
-            <a:off x="428325" y="3756500"/>
+            <a:off x="428325" y="4381500"/>
             <a:ext cx="340000" cy="340000"/>
           </a:xfrm>
           <a:prstGeom prst="rect">
@@ -20313,7 +20397,7 @@
             </a:pPr>
             <a:r>
               <a:rPr lang="en-US" sz="3200"/>
-              <a:t>📄</a:t>
+              <a:t>📸</a:t>
             </a:r>
             <a:endParaRPr/>
           </a:p>
@@ -20321,13 +20405,13 @@
       </p:sp>
       <p:sp>
         <p:nvSpPr>
-          <p:cNvPr id="209" name="tip-content-209"/>
+          <p:cNvPr id="209" name="usecase-content-209"/>
           <p:cNvSpPr txBox="1"/>
           <p:nvPr/>
         </p:nvSpPr>
         <p:spPr>
           <a:xfrm>
-            <a:off x="858325" y="3451500"/>
+            <a:off x="858325" y="4076500"/>
             <a:ext cx="5057450" cy="950000"/>
           </a:xfrm>
           <a:prstGeom prst="rect">
@@ -20362,7 +20446,7 @@
                   <a:srgbClr val="C47A20"/>
                 </a:solidFill>
               </a:rPr>
-              <a:t>Pagination for drill-down</a:t>
+              <a:t>Point in Time Reporting</a:t>
             </a:r>
             <a:endParaRPr/>
           </a:p>
@@ -20385,7 +20469,7 @@
                   <a:srgbClr val="444444"/>
                 </a:solidFill>
               </a:rPr>
-              <a:t>PaginationCursor + fetchPage for deleted rows and chart index ranges.</a:t>
+              <a:t>Snapshot a record-set selection for the user session.</a:t>
             </a:r>
             <a:endParaRPr/>
           </a:p>
@@ -20393,159 +20477,13 @@
       </p:sp>
       <p:sp>
         <p:nvSpPr>
-          <p:cNvPr id="210" name="tip-card-bg-210"/>
+          <p:cNvPr id="210" name="usecase-card-bg-210"/>
           <p:cNvSpPr/>
           <p:nvPr/>
         </p:nvSpPr>
         <p:spPr>
           <a:xfrm>
-            <a:off x="6160775" y="3366500"/>
-            <a:ext cx="5662450" cy="1120000"/>
-          </a:xfrm>
-          <a:prstGeom prst="roundRect">
-            <a:avLst>
-              <a:gd name="adj" fmla="val 8000"/>
-            </a:avLst>
-          </a:prstGeom>
-          <a:solidFill>
-            <a:srgbClr val="FEF5F6"/>
-          </a:solidFill>
-          <a:ln>
-            <a:noFill/>
-          </a:ln>
-          <a:effectLst>
-            <a:outerShdw blurRad="50800" dist="31750" dir="2700000" algn="ctr" rotWithShape="0">
-              <a:srgbClr val="000000">
-                <a:alpha val="28000"/>
-              </a:srgbClr>
-            </a:outerShdw>
-          </a:effectLst>
-        </p:spPr>
-        <p:txBody>
-          <a:bodyPr/>
-          <a:lstStyle/>
-          <a:p>
-            <a:endParaRPr/>
-          </a:p>
-        </p:txBody>
-      </p:sp>
-      <p:sp>
-        <p:nvSpPr>
-          <p:cNvPr id="211" name="tip-emoji-211"/>
-          <p:cNvSpPr txBox="1"/>
-          <p:nvPr/>
-        </p:nvSpPr>
-        <p:spPr>
-          <a:xfrm>
-            <a:off x="6250775" y="3756500"/>
-            <a:ext cx="340000" cy="340000"/>
-          </a:xfrm>
-          <a:prstGeom prst="rect">
-            <a:avLst/>
-          </a:prstGeom>
-          <a:noFill/>
-          <a:ln>
-            <a:noFill/>
-          </a:ln>
-        </p:spPr>
-        <p:txBody>
-          <a:bodyPr anchor="ctr" anchorCtr="1" wrap="none">
-            <a:noAutofit/>
-          </a:bodyPr>
-          <a:lstStyle/>
-          <a:p>
-            <a:pPr algn="ctr">
-              <a:buNone/>
-            </a:pPr>
-            <a:r>
-              <a:rPr lang="en-US" sz="3200"/>
-              <a:t>📐</a:t>
-            </a:r>
-            <a:endParaRPr/>
-          </a:p>
-        </p:txBody>
-      </p:sp>
-      <p:sp>
-        <p:nvSpPr>
-          <p:cNvPr id="212" name="tip-content-212"/>
-          <p:cNvSpPr txBox="1"/>
-          <p:nvPr/>
-        </p:nvSpPr>
-        <p:spPr>
-          <a:xfrm>
-            <a:off x="6680775" y="3451500"/>
-            <a:ext cx="5057450" cy="950000"/>
-          </a:xfrm>
-          <a:prstGeom prst="rect">
-            <a:avLst/>
-          </a:prstGeom>
-          <a:noFill/>
-          <a:ln>
-            <a:noFill/>
-          </a:ln>
-        </p:spPr>
-        <p:txBody>
-          <a:bodyPr anchor="t" anchorCtr="0" wrap="square" lIns="27432" rIns="27432" tIns="0" bIns="0">
-            <a:noAutofit/>
-          </a:bodyPr>
-          <a:lstStyle/>
-          <a:p>
-            <a:pPr marL="0" indent="0" algn="l">
-              <a:lnSpc>
-                <a:spcPct val="105000"/>
-              </a:lnSpc>
-              <a:spcBef>
-                <a:spcPts val="0"/>
-              </a:spcBef>
-              <a:spcAft>
-                <a:spcPts val="80"/>
-              </a:spcAft>
-              <a:buNone/>
-            </a:pPr>
-            <a:r>
-              <a:rPr lang="en-US" sz="1650" b="1">
-                <a:solidFill>
-                  <a:srgbClr val="891019"/>
-                </a:solidFill>
-              </a:rPr>
-              <a:t>Stable ORDER BY</a:t>
-            </a:r>
-            <a:endParaRPr/>
-          </a:p>
-          <a:p>
-            <a:pPr marL="0" indent="0" algn="l">
-              <a:lnSpc>
-                <a:spcPct val="115000"/>
-              </a:lnSpc>
-              <a:spcBef>
-                <a:spcPts val="0"/>
-              </a:spcBef>
-              <a:spcAft>
-                <a:spcPts val="0"/>
-              </a:spcAft>
-              <a:buNone/>
-            </a:pPr>
-            <a:r>
-              <a:rPr lang="en-US" sz="1500">
-                <a:solidFill>
-                  <a:srgbClr val="444444"/>
-                </a:solidFill>
-              </a:rPr>
-              <a:t>Sort on a unique key so offsets and page indexes stay predictable.</a:t>
-            </a:r>
-            <a:endParaRPr/>
-          </a:p>
-        </p:txBody>
-      </p:sp>
-      <p:sp>
-        <p:nvSpPr>
-          <p:cNvPr id="213" name="tip-card-bg-213"/>
-          <p:cNvSpPr/>
-          <p:nvPr/>
-        </p:nvSpPr>
-        <p:spPr>
-          <a:xfrm>
-            <a:off x="338325" y="4616500"/>
+            <a:off x="6160775" y="3991500"/>
             <a:ext cx="5662450" cy="1120000"/>
           </a:xfrm>
           <a:prstGeom prst="roundRect">
@@ -20577,13 +20515,13 @@
       </p:sp>
       <p:sp>
         <p:nvSpPr>
-          <p:cNvPr id="214" name="tip-emoji-214"/>
+          <p:cNvPr id="211" name="usecase-emoji-211"/>
           <p:cNvSpPr txBox="1"/>
           <p:nvPr/>
         </p:nvSpPr>
         <p:spPr>
           <a:xfrm>
-            <a:off x="428325" y="5006500"/>
+            <a:off x="6250775" y="4381500"/>
             <a:ext cx="340000" cy="340000"/>
           </a:xfrm>
           <a:prstGeom prst="rect">
@@ -20605,7 +20543,7 @@
             </a:pPr>
             <a:r>
               <a:rPr lang="en-US" sz="3200"/>
-              <a:t>⚡</a:t>
+              <a:t>📋</a:t>
             </a:r>
             <a:endParaRPr/>
           </a:p>
@@ -20613,13 +20551,13 @@
       </p:sp>
       <p:sp>
         <p:nvSpPr>
-          <p:cNvPr id="215" name="tip-content-215"/>
+          <p:cNvPr id="212" name="usecase-content-212"/>
           <p:cNvSpPr txBox="1"/>
           <p:nvPr/>
         </p:nvSpPr>
         <p:spPr>
           <a:xfrm>
-            <a:off x="858325" y="4701500"/>
+            <a:off x="6680775" y="4076500"/>
             <a:ext cx="5057450" cy="950000"/>
           </a:xfrm>
           <a:prstGeom prst="rect">
@@ -20654,7 +20592,7 @@
                   <a:srgbClr val="2E6DB4"/>
                 </a:solidFill>
               </a:rPr>
-              <a:t>Right-size each fetch</a:t>
+              <a:t>Simple Queue</a:t>
             </a:r>
             <a:endParaRPr/>
           </a:p>
@@ -20677,7 +20615,7 @@
                   <a:srgbClr val="444444"/>
                 </a:solidFill>
               </a:rPr>
-              <a:t>Smaller batches feel snappier; larger batches mean fewer fetch calls.</a:t>
+              <a:t>Create task records and delete when complete — until cursor rows reach zero.</a:t>
             </a:r>
             <a:endParaRPr/>
           </a:p>
@@ -20685,52 +20623,14 @@
       </p:sp>
       <p:sp>
         <p:nvSpPr>
-          <p:cNvPr id="216" name="tip-card-bg-216"/>
-          <p:cNvSpPr/>
-          <p:nvPr/>
-        </p:nvSpPr>
-        <p:spPr>
-          <a:xfrm>
-            <a:off x="6160775" y="4616500"/>
-            <a:ext cx="5662450" cy="1120000"/>
-          </a:xfrm>
-          <a:prstGeom prst="roundRect">
-            <a:avLst>
-              <a:gd name="adj" fmla="val 8000"/>
-            </a:avLst>
-          </a:prstGeom>
-          <a:solidFill>
-            <a:srgbClr val="F7F5FA"/>
-          </a:solidFill>
-          <a:ln>
-            <a:noFill/>
-          </a:ln>
-          <a:effectLst>
-            <a:outerShdw blurRad="50800" dist="31750" dir="2700000" algn="ctr" rotWithShape="0">
-              <a:srgbClr val="000000">
-                <a:alpha val="28000"/>
-              </a:srgbClr>
-            </a:outerShdw>
-          </a:effectLst>
-        </p:spPr>
-        <p:txBody>
-          <a:bodyPr/>
-          <a:lstStyle/>
-          <a:p>
-            <a:endParaRPr/>
-          </a:p>
-        </p:txBody>
-      </p:sp>
-      <p:sp>
-        <p:nvSpPr>
-          <p:cNvPr id="217" name="tip-emoji-217"/>
+          <p:cNvPr id="118" name="usecases-subtitle"/>
           <p:cNvSpPr txBox="1"/>
           <p:nvPr/>
         </p:nvSpPr>
         <p:spPr>
           <a:xfrm>
-            <a:off x="6250775" y="5006500"/>
-            <a:ext cx="340000" cy="340000"/>
+            <a:off x="338325" y="995000"/>
+            <a:ext cx="11484900" cy="150000"/>
           </a:xfrm>
           <a:prstGeom prst="rect">
             <a:avLst/>
@@ -20741,114 +20641,6 @@
           </a:ln>
         </p:spPr>
         <p:txBody>
-          <a:bodyPr anchor="ctr" anchorCtr="1" wrap="none">
-            <a:noAutofit/>
-          </a:bodyPr>
-          <a:lstStyle/>
-          <a:p>
-            <a:pPr algn="ctr">
-              <a:buNone/>
-            </a:pPr>
-            <a:r>
-              <a:rPr lang="en-US" sz="3200"/>
-              <a:t>🛡️</a:t>
-            </a:r>
-            <a:endParaRPr/>
-          </a:p>
-        </p:txBody>
-      </p:sp>
-      <p:sp>
-        <p:nvSpPr>
-          <p:cNvPr id="218" name="tip-content-218"/>
-          <p:cNvSpPr txBox="1"/>
-          <p:nvPr/>
-        </p:nvSpPr>
-        <p:spPr>
-          <a:xfrm>
-            <a:off x="6680775" y="4701500"/>
-            <a:ext cx="5057450" cy="950000"/>
-          </a:xfrm>
-          <a:prstGeom prst="rect">
-            <a:avLst/>
-          </a:prstGeom>
-          <a:noFill/>
-          <a:ln>
-            <a:noFill/>
-          </a:ln>
-        </p:spPr>
-        <p:txBody>
-          <a:bodyPr anchor="t" anchorCtr="0" wrap="square" lIns="27432" rIns="27432" tIns="0" bIns="0">
-            <a:noAutofit/>
-          </a:bodyPr>
-          <a:lstStyle/>
-          <a:p>
-            <a:pPr marL="0" indent="0" algn="l">
-              <a:lnSpc>
-                <a:spcPct val="105000"/>
-              </a:lnSpc>
-              <a:spcBef>
-                <a:spcPts val="0"/>
-              </a:spcBef>
-              <a:spcAft>
-                <a:spcPts val="80"/>
-              </a:spcAft>
-              <a:buNone/>
-            </a:pPr>
-            <a:r>
-              <a:rPr lang="en-US" sz="1650" b="1">
-                <a:solidFill>
-                  <a:srgbClr val="6B5B95"/>
-                </a:solidFill>
-              </a:rPr>
-              <a:t>USER_MODE by default</a:t>
-            </a:r>
-            <a:endParaRPr/>
-          </a:p>
-          <a:p>
-            <a:pPr marL="0" indent="0" algn="l">
-              <a:lnSpc>
-                <a:spcPct val="115000"/>
-              </a:lnSpc>
-              <a:spcBef>
-                <a:spcPts val="0"/>
-              </a:spcBef>
-              <a:spcAft>
-                <a:spcPts val="0"/>
-              </a:spcAft>
-              <a:buNone/>
-            </a:pPr>
-            <a:r>
-              <a:rPr lang="en-US" sz="1500">
-                <a:solidFill>
-                  <a:srgbClr val="444444"/>
-                </a:solidFill>
-              </a:rPr>
-              <a:t>Pass AccessLevel.USER_MODE on getCursor unless elevated access is required.</a:t>
-            </a:r>
-            <a:endParaRPr/>
-          </a:p>
-        </p:txBody>
-      </p:sp>
-      <p:sp>
-        <p:nvSpPr>
-          <p:cNvPr id="118" name="tips-subtitle"/>
-          <p:cNvSpPr txBox="1"/>
-          <p:nvPr/>
-        </p:nvSpPr>
-        <p:spPr>
-          <a:xfrm>
-            <a:off x="338325" y="995000"/>
-            <a:ext cx="11484900" cy="150000"/>
-          </a:xfrm>
-          <a:prstGeom prst="rect">
-            <a:avLst/>
-          </a:prstGeom>
-          <a:noFill/>
-          <a:ln>
-            <a:noFill/>
-          </a:ln>
-        </p:spPr>
-        <p:txBody>
           <a:bodyPr anchor="t" wrap="square">
             <a:noAutofit/>
           </a:bodyPr>
@@ -20863,7 +20655,7 @@
                   <a:srgbClr val="666666"/>
                 </a:solidFill>
               </a:rPr>
-              <a:t>Practical patterns from the Apex Cursor demos</a:t>
+              <a:t>Cursor patterns beyond the three demos</a:t>
             </a:r>
             <a:endParaRPr/>
           </a:p>
@@ -20915,7 +20707,7 @@
             </a:pPr>
             <a:r>
               <a:rPr lang="en-US"/>
-              <a:t>Tips and Tricks</a:t>
+              <a:t>Other Use Cases</a:t>
             </a:r>
             <a:endParaRPr/>
           </a:p>
@@ -22152,7 +21944,7 @@
             </a:pPr>
             <a:r>
               <a:rPr lang="en-US" sz="1800"/>
-              <a:t>Analyst large data view</a:t>
+              <a:t>Data Analyst tools and views</a:t>
             </a:r>
             <a:endParaRPr/>
           </a:p>
@@ -22175,7 +21967,7 @@
             </a:pPr>
             <a:r>
               <a:rPr lang="en-US" sz="1800"/>
-              <a:t>Reporting and drilldown</a:t>
+              <a:t>End user list views, reporting and drilldown</a:t>
             </a:r>
             <a:endParaRPr/>
           </a:p>
@@ -22293,7 +22085,7 @@
             </a:pPr>
             <a:r>
               <a:rPr lang="en-US" sz="1800"/>
-              <a:t>Look ahead to optimize resource usage</a:t>
+              <a:t>Look ahead to optimize within limits</a:t>
             </a:r>
             <a:endParaRPr/>
           </a:p>
@@ -22466,10 +22258,18 @@
             <a:r>
               <a:rPr lang="en-US" sz="1700" typeface="Consolas">
                 <a:solidFill>
+                  <a:srgbClr val="569CD6"/>
+                </a:solidFill>
+              </a:rPr>
+              <a:t>Database.CursorFetchResult</a:t>
+            </a:r>
+            <a:r>
+              <a:rPr lang="en-US" sz="1700" typeface="Consolas">
+                <a:solidFill>
                   <a:srgbClr val="D4D4D4"/>
                 </a:solidFill>
               </a:rPr>
-              <a:t>Database.CursorFetchResult r =</a:t>
+              <a:t> r =</a:t>
             </a:r>
             <a:endParaRPr/>
           </a:p>
@@ -22565,7 +22365,7 @@
             <a:r>
               <a:rPr lang="en-US" sz="1700" typeface="Consolas">
                 <a:solidFill>
-                  <a:srgbClr val="4EC9B0"/>
+                  <a:srgbClr val="569CD6"/>
                 </a:solidFill>
               </a:rPr>
               <a:t>Database.Cursor</a:t>
@@ -22642,10 +22442,18 @@
             <a:r>
               <a:rPr lang="en-US" sz="1700" typeface="Consolas">
                 <a:solidFill>
+                  <a:srgbClr val="569CD6"/>
+                </a:solidFill>
+              </a:rPr>
+              <a:t>List&lt;Account&gt;</a:t>
+            </a:r>
+            <a:r>
+              <a:rPr lang="en-US" sz="1700" typeface="Consolas">
+                <a:solidFill>
                   <a:srgbClr val="D4D4D4"/>
                 </a:solidFill>
               </a:rPr>
-              <a:t>List&lt;Account&gt; batch =</a:t>
+              <a:t> batch =</a:t>
             </a:r>
             <a:endParaRPr/>
           </a:p>
@@ -22768,6 +22576,49 @@
             <a:r>
               <a:rPr lang="en-US" sz="1800"/>
               <a:t>24hr cached large record sets | Scalable replacement to SOQL OFFSET | Bidirectional navigation</a:t>
+            </a:r>
+            <a:endParaRPr/>
+          </a:p>
+        </p:txBody>
+      </p:sp>
+      <p:sp>
+        <p:nvSpPr>
+          <p:cNvPr id="122" name="usecases-subtitle"/>
+          <p:cNvSpPr txBox="1"/>
+          <p:nvPr/>
+        </p:nvSpPr>
+        <p:spPr>
+          <a:xfrm>
+            <a:off x="338325" y="960000"/>
+            <a:ext cx="11484900" cy="120000"/>
+          </a:xfrm>
+          <a:prstGeom prst="rect">
+            <a:avLst/>
+          </a:prstGeom>
+          <a:noFill/>
+          <a:ln>
+            <a:noFill/>
+          </a:ln>
+        </p:spPr>
+        <p:txBody>
+          <a:bodyPr anchorCtr="0" anchor="t" bIns="0" lIns="0" rIns="0" tIns="0" wrap="square">
+            <a:noAutofit/>
+          </a:bodyPr>
+          <a:lstStyle/>
+          <a:p>
+            <a:pPr indent="0" lvl="0" marL="0" rtl="0" algn="l">
+              <a:lnSpc>
+                <a:spcPct val="100000"/>
+              </a:lnSpc>
+              <a:buNone/>
+            </a:pPr>
+            <a:r>
+              <a:rPr lang="en-US" sz="2000">
+                <a:solidFill>
+                  <a:srgbClr val="222222"/>
+                </a:solidFill>
+              </a:rPr>
+              <a:t>Optimial handling of larger data volumes</a:t>
             </a:r>
             <a:endParaRPr/>
           </a:p>
@@ -23013,7 +22864,7 @@
           </a:effectLst>
         </p:spPr>
         <p:txBody>
-          <a:bodyPr anchorCtr="0" anchor="t" bIns="160000" lIns="72000" rIns="72000" tIns="55000" wrap="square">
+          <a:bodyPr anchorCtr="0" anchor="t" bIns="160000" lIns="72000" rIns="72000" tIns="55000" wrap="none" horzOverflow="clip" vertOverflow="clip">
             <a:noAutofit/>
           </a:bodyPr>
           <a:lstStyle/>
@@ -23056,18 +22907,79 @@
             <a:r>
               <a:rPr lang="en-US" sz="1500" typeface="Consolas">
                 <a:solidFill>
-                  <a:srgbClr val="4EC9B0"/>
+                  <a:srgbClr val="DCDCAA"/>
                 </a:solidFill>
               </a:rPr>
-              <a:t>Database.Cursor</a:t>
-            </a:r>
+              <a:t>cursor = Database.getCursor(</a:t>
+            </a:r>
+            <a:endParaRPr/>
+          </a:p>
+          <a:p>
+            <a:pPr indent="0" lvl="0" marL="0" rtl="0" algn="l">
+              <a:lnSpc>
+                <a:spcPct val="100000"/>
+              </a:lnSpc>
+              <a:spcBef>
+                <a:spcPts val="40"/>
+              </a:spcBef>
+              <a:spcAft>
+                <a:spcPts val="0"/>
+              </a:spcAft>
+              <a:buNone/>
+            </a:pPr>
             <a:r>
               <a:rPr lang="en-US" sz="1500" typeface="Consolas">
                 <a:solidFill>
+                  <a:srgbClr val="CE9178"/>
+                </a:solidFill>
+              </a:rPr>
+              <a:t>    ACCOUNT_SOQL,</a:t>
+            </a:r>
+            <a:endParaRPr/>
+          </a:p>
+          <a:p>
+            <a:pPr indent="0" lvl="0" marL="0" rtl="0" algn="l">
+              <a:lnSpc>
+                <a:spcPct val="100000"/>
+              </a:lnSpc>
+              <a:spcBef>
+                <a:spcPts val="40"/>
+              </a:spcBef>
+              <a:spcAft>
+                <a:spcPts val="0"/>
+              </a:spcAft>
+              <a:buNone/>
+            </a:pPr>
+            <a:r>
+              <a:rPr lang="en-US" sz="1500" typeface="Consolas">
+                <a:solidFill>
+                  <a:srgbClr val="CE9178"/>
+                </a:solidFill>
+              </a:rPr>
+              <a:t>    AccessLevel.USER_MODE);</a:t>
+            </a:r>
+            <a:endParaRPr/>
+          </a:p>
+          <a:p>
+            <a:pPr indent="0" lvl="0" marL="0" rtl="0" algn="l">
+              <a:lnSpc>
+                <a:spcPct val="100000"/>
+              </a:lnSpc>
+              <a:spcBef>
+                <a:spcPts val="40"/>
+              </a:spcBef>
+              <a:spcAft>
+                <a:spcPts val="0"/>
+              </a:spcAft>
+              <a:buNone/>
+            </a:pPr>
+            <a:r>
+              <a:rPr lang="en-US" sz="1500" typeface="Consolas">
+                <a:solidFill>
                   <a:srgbClr val="D4D4D4"/>
                 </a:solidFill>
               </a:rPr>
-              <a:t> c =</a:t>
+              <a:t>pageCursor =</a:t>
             </a:r>
             <a:endParaRPr/>
           </a:p>
@@ -23090,7 +23002,7 @@
                   <a:srgbClr val="DCDCAA"/>
                 </a:solidFill>
               </a:rPr>
-              <a:t>  Database.getCursor(</a:t>
+              <a:t>  Database.getPaginationCursor(</a:t>
             </a:r>
             <a:endParaRPr/>
           </a:p>
@@ -23113,7 +23025,7 @@
                   <a:srgbClr val="CE9178"/>
                 </a:solidFill>
               </a:rPr>
-              <a:t>    soql,</a:t>
+              <a:t>    ACCOUNT_SOQL,</a:t>
             </a:r>
             <a:endParaRPr/>
           </a:p>
@@ -23222,7 +23134,7 @@
           </a:effectLst>
         </p:spPr>
         <p:txBody>
-          <a:bodyPr anchorCtr="0" anchor="t" bIns="160000" lIns="72000" rIns="72000" tIns="55000" wrap="square">
+          <a:bodyPr anchorCtr="0" anchor="t" bIns="160000" lIns="72000" rIns="72000" tIns="55000" wrap="none" horzOverflow="clip" vertOverflow="clip">
             <a:noAutofit/>
           </a:bodyPr>
           <a:lstStyle/>
@@ -23268,7 +23180,7 @@
                   <a:srgbClr val="D4D4D4"/>
                 </a:solidFill>
               </a:rPr>
-              <a:t>List&lt;Account&gt; batch =</a:t>
+              <a:t>if (pageCursor == null) {</a:t>
             </a:r>
             <a:endParaRPr/>
           </a:p>
@@ -23291,7 +23203,7 @@
                   <a:srgbClr val="DCDCAA"/>
                 </a:solidFill>
               </a:rPr>
-              <a:t>  c.fetch(offset,</a:t>
+              <a:t>  pageCursor = Database.getPaginationCursor(</a:t>
             </a:r>
             <a:endParaRPr/>
           </a:p>
@@ -23314,7 +23226,7 @@
                   <a:srgbClr val="CE9178"/>
                 </a:solidFill>
               </a:rPr>
-              <a:t>    batchSize);</a:t>
+              <a:t>    ACCOUNT_SOQL, AccessLevel.USER_MODE);</a:t>
             </a:r>
             <a:endParaRPr/>
           </a:p>
@@ -23334,10 +23246,56 @@
             <a:r>
               <a:rPr lang="en-US" sz="1500" typeface="Consolas">
                 <a:solidFill>
+                  <a:srgbClr val="DCDCAA"/>
+                </a:solidFill>
+              </a:rPr>
+              <a:t>  Cache.Session.put(</a:t>
+            </a:r>
+            <a:endParaRPr/>
+          </a:p>
+          <a:p>
+            <a:pPr indent="0" lvl="0" marL="0" rtl="0" algn="l">
+              <a:lnSpc>
+                <a:spcPct val="100000"/>
+              </a:lnSpc>
+              <a:spcBef>
+                <a:spcPts val="40"/>
+              </a:spcBef>
+              <a:spcAft>
+                <a:spcPts val="0"/>
+              </a:spcAft>
+              <a:buNone/>
+            </a:pPr>
+            <a:r>
+              <a:rPr lang="en-US" sz="1500" typeface="Consolas">
+                <a:solidFill>
+                  <a:srgbClr val="CE9178"/>
+                </a:solidFill>
+              </a:rPr>
+              <a:t>    SESSION_PAGINATION_CURSOR_KEY,</a:t>
+            </a:r>
+            <a:endParaRPr/>
+          </a:p>
+          <a:p>
+            <a:pPr indent="0" lvl="0" marL="0" rtl="0" algn="l">
+              <a:lnSpc>
+                <a:spcPct val="100000"/>
+              </a:lnSpc>
+              <a:spcBef>
+                <a:spcPts val="40"/>
+              </a:spcBef>
+              <a:spcAft>
+                <a:spcPts val="0"/>
+              </a:spcAft>
+              <a:buNone/>
+            </a:pPr>
+            <a:r>
+              <a:rPr lang="en-US" sz="1500" typeface="Consolas">
+                <a:solidFill>
                   <a:srgbClr val="D4D4D4"/>
                 </a:solidFill>
               </a:rPr>
-              <a:t>result.hasMore =</a:t>
+              <a:t>    pageCursor);</a:t>
             </a:r>
             <a:endParaRPr/>
           </a:p>
@@ -23357,10 +23315,10 @@
             <a:r>
               <a:rPr lang="en-US" sz="1500" typeface="Consolas">
                 <a:solidFill>
-                  <a:srgbClr val="CE9178"/>
+                  <a:srgbClr val="D4D4D4"/>
                 </a:solidFill>
               </a:rPr>
-              <a:t>  offset &lt; c.getNumRecords();</a:t>
+              <a:t>}</a:t>
             </a:r>
             <a:endParaRPr/>
           </a:p>
@@ -23446,7 +23404,7 @@
           </a:effectLst>
         </p:spPr>
         <p:txBody>
-          <a:bodyPr anchorCtr="0" anchor="t" bIns="160000" lIns="72000" rIns="72000" tIns="55000" wrap="square">
+          <a:bodyPr anchorCtr="0" anchor="t" bIns="160000" lIns="72000" rIns="72000" tIns="55000" wrap="none" horzOverflow="clip" vertOverflow="clip">
             <a:noAutofit/>
           </a:bodyPr>
           <a:lstStyle/>
@@ -23489,10 +23447,10 @@
             <a:r>
               <a:rPr lang="en-US" sz="1500" typeface="Consolas">
                 <a:solidFill>
-                  <a:srgbClr val="569CD6"/>
+                  <a:srgbClr val="D4D4D4"/>
                 </a:solidFill>
               </a:rPr>
-              <a:t>const result = await</a:t>
+              <a:t>Integer remaining = totalRecords - start;</a:t>
             </a:r>
             <a:endParaRPr/>
           </a:p>
@@ -23512,10 +23470,49 @@
             <a:r>
               <a:rPr lang="en-US" sz="1500" typeface="Consolas">
                 <a:solidFill>
+                  <a:srgbClr val="D4D4D4"/>
+                </a:solidFill>
+              </a:rPr>
+              <a:t>Integer fetchSize = remaining &gt; 0</a:t>
+            </a:r>
+            <a:endParaRPr/>
+          </a:p>
+          <a:p>
+            <a:pPr indent="0" lvl="0" marL="0" rtl="0" algn="l">
+              <a:lnSpc>
+                <a:spcPct val="100000"/>
+              </a:lnSpc>
+              <a:spcBef>
+                <a:spcPts val="40"/>
+              </a:spcBef>
+              <a:spcAft>
+                <a:spcPts val="0"/>
+              </a:spcAft>
+              <a:buNone/>
+            </a:pPr>
+            <a:r>
+              <a:rPr lang="en-US" sz="1500" typeface="Consolas">
+                <a:solidFill>
+                  <a:srgbClr val="D4D4D4"/>
+                </a:solidFill>
+              </a:rPr>
+              <a:t>    ? </a:t>
+            </a:r>
+            <a:r>
+              <a:rPr lang="en-US" sz="1500" typeface="Consolas">
+                <a:solidFill>
                   <a:srgbClr val="DCDCAA"/>
                 </a:solidFill>
               </a:rPr>
-              <a:t>  loadMoreRecords({</a:t>
+              <a:t>Math.min</a:t>
+            </a:r>
+            <a:r>
+              <a:rPr lang="en-US" sz="1500" typeface="Consolas">
+                <a:solidFill>
+                  <a:srgbClr val="CE9178"/>
+                </a:solidFill>
+              </a:rPr>
+              <a:t>(pageSize, remaining) : 0;</a:t>
             </a:r>
             <a:endParaRPr/>
           </a:p>
@@ -23535,10 +23532,49 @@
             <a:r>
               <a:rPr lang="en-US" sz="1500" typeface="Consolas">
                 <a:solidFill>
+                  <a:srgbClr val="D4D4D4"/>
+                </a:solidFill>
+              </a:rPr>
+              <a:t>fetchResult = fetchSize &gt; 0</a:t>
+            </a:r>
+            <a:endParaRPr/>
+          </a:p>
+          <a:p>
+            <a:pPr indent="0" lvl="0" marL="0" rtl="0" algn="l">
+              <a:lnSpc>
+                <a:spcPct val="100000"/>
+              </a:lnSpc>
+              <a:spcBef>
+                <a:spcPts val="40"/>
+              </a:spcBef>
+              <a:spcAft>
+                <a:spcPts val="0"/>
+              </a:spcAft>
+              <a:buNone/>
+            </a:pPr>
+            <a:r>
+              <a:rPr lang="en-US" sz="1500" typeface="Consolas">
+                <a:solidFill>
+                  <a:srgbClr val="D4D4D4"/>
+                </a:solidFill>
+              </a:rPr>
+              <a:t>    ? </a:t>
+            </a:r>
+            <a:r>
+              <a:rPr lang="en-US" sz="1500" typeface="Consolas">
+                <a:solidFill>
+                  <a:srgbClr val="DCDCAA"/>
+                </a:solidFill>
+              </a:rPr>
+              <a:t>pageCursor.fetchPage</a:t>
+            </a:r>
+            <a:r>
+              <a:rPr lang="en-US" sz="1500" typeface="Consolas">
+                <a:solidFill>
                   <a:srgbClr val="CE9178"/>
                 </a:solidFill>
               </a:rPr>
-              <a:t>    request, useSessionCache</a:t>
+              <a:t>(start, fetchSize)</a:t>
             </a:r>
             <a:endParaRPr/>
           </a:p>
@@ -23558,10 +23594,10 @@
             <a:r>
               <a:rPr lang="en-US" sz="1500" typeface="Consolas">
                 <a:solidFill>
-                  <a:srgbClr val="DCDCAA"/>
+                  <a:srgbClr val="CE9178"/>
                 </a:solidFill>
               </a:rPr>
-              <a:t>  });</a:t>
+              <a:t>    : null;</a:t>
             </a:r>
             <a:endParaRPr/>
           </a:p>
@@ -23670,7 +23706,7 @@
             </a:pPr>
             <a:r>
               <a:rPr lang="en-US" sz="1800"/>
-              <a:t>Infinite scroll loads 50 rows at a time — no SOQL OFFSET</a:t>
+              <a:t>Standard Cursor or PaginationCursor — same ACCOUNT_SOQL, different paging APIs</a:t>
             </a:r>
             <a:endParaRPr/>
           </a:p>
@@ -23693,7 +23729,7 @@
             </a:pPr>
             <a:r>
               <a:rPr lang="en-US" sz="1800"/>
-              <a:t>Cursor held in LWC state or Cache.Session across Apex calls</a:t>
+              <a:t>Optional Cache.Session keeps the pagination cursor across user session</a:t>
             </a:r>
             <a:endParaRPr/>
           </a:p>
@@ -23716,7 +23752,7 @@
             </a:pPr>
             <a:r>
               <a:rPr lang="en-US" sz="1800"/>
-              <a:t>Live limit panel surfaces cursor, fetch, and row governor usage</a:t>
+              <a:t>Page size is capped to remaining rows in the result set</a:t>
             </a:r>
             <a:endParaRPr/>
           </a:p>
@@ -23739,7 +23775,7 @@
             </a:pPr>
             <a:r>
               <a:rPr lang="en-US" sz="1800"/>
-              <a:t>Switch between standard and pagination cursor modes in one LWC</a:t>
+              <a:t>Limits panel shows cursor, fetch, and daily governor usage</a:t>
             </a:r>
             <a:endParaRPr/>
           </a:p>
@@ -23985,7 +24021,7 @@
           </a:effectLst>
         </p:spPr>
         <p:txBody>
-          <a:bodyPr anchorCtr="0" anchor="t" bIns="160000" lIns="72000" rIns="72000" tIns="55000" wrap="square">
+          <a:bodyPr anchorCtr="0" anchor="t" bIns="160000" lIns="72000" rIns="72000" tIns="55000" wrap="none" horzOverflow="clip" vertOverflow="clip">
             <a:noAutofit/>
           </a:bodyPr>
           <a:lstStyle/>
@@ -24008,7 +24044,7 @@
                   <a:srgbClr val="6A9955"/>
                 </a:solidFill>
               </a:rPr>
-              <a:t>apex&gt;</a:t>
+              <a:t>soql&gt;</a:t>
             </a:r>
             <a:endParaRPr/>
           </a:p>
@@ -24031,7 +24067,7 @@
                   <a:srgbClr val="569CD6"/>
                 </a:solidFill>
               </a:rPr>
-              <a:t>Database.PaginationCursor</a:t>
+              <a:t>SELECT</a:t>
             </a:r>
             <a:r>
               <a:rPr lang="en-US" sz="1500" typeface="Consolas">
@@ -24039,7 +24075,7 @@
                   <a:srgbClr val="D4D4D4"/>
                 </a:solidFill>
               </a:rPr>
-              <a:t> pc =</a:t>
+              <a:t> Id, EffectiveDate__c,</a:t>
             </a:r>
             <a:endParaRPr/>
           </a:p>
@@ -24059,10 +24095,10 @@
             <a:r>
               <a:rPr lang="en-US" sz="1500" typeface="Consolas">
                 <a:solidFill>
-                  <a:srgbClr val="DCDCAA"/>
+                  <a:srgbClr val="D4D4D4"/>
                 </a:solidFill>
               </a:rPr>
-              <a:t>  Database.getPaginationCursor(</a:t>
+              <a:t>  Value__c, Product__c</a:t>
             </a:r>
             <a:endParaRPr/>
           </a:p>
@@ -24082,10 +24118,18 @@
             <a:r>
               <a:rPr lang="en-US" sz="1500" typeface="Consolas">
                 <a:solidFill>
-                  <a:srgbClr val="CE9178"/>
+                  <a:srgbClr val="569CD6"/>
                 </a:solidFill>
               </a:rPr>
-              <a:t>    soql,</a:t>
+              <a:t>FROM</a:t>
+            </a:r>
+            <a:r>
+              <a:rPr lang="en-US" sz="1500" typeface="Consolas">
+                <a:solidFill>
+                  <a:srgbClr val="D4D4D4"/>
+                </a:solidFill>
+              </a:rPr>
+              <a:t> UnitPriceObservation__c</a:t>
             </a:r>
             <a:endParaRPr/>
           </a:p>
@@ -24105,10 +24149,18 @@
             <a:r>
               <a:rPr lang="en-US" sz="1500" typeface="Consolas">
                 <a:solidFill>
-                  <a:srgbClr val="CE9178"/>
+                  <a:srgbClr val="569CD6"/>
                 </a:solidFill>
               </a:rPr>
-              <a:t>    AccessLevel.USER_MODE);</a:t>
+              <a:t>WHERE</a:t>
+            </a:r>
+            <a:r>
+              <a:rPr lang="en-US" sz="1500" typeface="Consolas">
+                <a:solidFill>
+                  <a:srgbClr val="D4D4D4"/>
+                </a:solidFill>
+              </a:rPr>
+              <a:t> Product__c = :product</a:t>
             </a:r>
             <a:endParaRPr/>
           </a:p>
@@ -24121,40 +24173,33 @@
                 <a:spcPts val="40"/>
               </a:spcBef>
               <a:spcAft>
-                <a:spcPts val="0"/>
+                <a:spcPts val="160"/>
               </a:spcAft>
               <a:buNone/>
             </a:pPr>
             <a:r>
               <a:rPr lang="en-US" sz="1500" typeface="Consolas">
                 <a:solidFill>
-                  <a:srgbClr val="DCDCAA"/>
+                  <a:srgbClr val="569CD6"/>
                 </a:solidFill>
               </a:rPr>
-              <a:t>Cache.Session.put(</a:t>
-            </a:r>
-            <a:endParaRPr/>
-          </a:p>
-          <a:p>
-            <a:pPr indent="0" lvl="0" marL="0" rtl="0" algn="l">
-              <a:lnSpc>
-                <a:spcPct val="100000"/>
-              </a:lnSpc>
-              <a:spcBef>
-                <a:spcPts val="40"/>
-              </a:spcBef>
-              <a:spcAft>
-                <a:spcPts val="160"/>
-              </a:spcAft>
-              <a:buNone/>
-            </a:pPr>
+              <a:t>ORDER BY</a:t>
+            </a:r>
             <a:r>
               <a:rPr lang="en-US" sz="1500" typeface="Consolas">
                 <a:solidFill>
-                  <a:srgbClr val="CE9178"/>
+                  <a:srgbClr val="D4D4D4"/>
                 </a:solidFill>
               </a:rPr>
-              <a:t>  sessionKey(product), pc);</a:t>
+              <a:t> EffectiveDate__c </a:t>
+            </a:r>
+            <a:r>
+              <a:rPr lang="en-US" sz="1500" typeface="Consolas">
+                <a:solidFill>
+                  <a:srgbClr val="569CD6"/>
+                </a:solidFill>
+              </a:rPr>
+              <a:t>ASC</a:t>
             </a:r>
             <a:endParaRPr/>
           </a:p>
@@ -24240,7 +24285,7 @@
           </a:effectLst>
         </p:spPr>
         <p:txBody>
-          <a:bodyPr anchorCtr="0" anchor="t" bIns="160000" lIns="72000" rIns="72000" tIns="55000" wrap="square">
+          <a:bodyPr anchorCtr="0" anchor="t" bIns="160000" lIns="72000" rIns="72000" tIns="55000" wrap="none" horzOverflow="clip" vertOverflow="clip">
             <a:noAutofit/>
           </a:bodyPr>
           <a:lstStyle/>
@@ -24283,102 +24328,56 @@
             <a:r>
               <a:rPr lang="en-US" sz="1500" typeface="Consolas">
                 <a:solidFill>
+                  <a:srgbClr val="569CD6"/>
+                </a:solidFill>
+              </a:rPr>
+              <a:t>Database.CursorFetchResult</a:t>
+            </a:r>
+            <a:endParaRPr/>
+          </a:p>
+          <a:p>
+            <a:pPr indent="0" lvl="0" marL="0" rtl="0" algn="l">
+              <a:lnSpc>
+                <a:spcPct val="100000"/>
+              </a:lnSpc>
+              <a:spcBef>
+                <a:spcPts val="40"/>
+              </a:spcBef>
+              <a:spcAft>
+                <a:spcPts val="0"/>
+              </a:spcAft>
+              <a:buNone/>
+            </a:pPr>
+            <a:r>
+              <a:rPr lang="en-US" sz="1500" typeface="Consolas">
+                <a:solidFill>
+                  <a:srgbClr val="D4D4D4"/>
+                </a:solidFill>
+              </a:rPr>
+              <a:t>   midChunk =</a:t>
+            </a:r>
+            <a:endParaRPr/>
+          </a:p>
+          <a:p>
+            <a:pPr indent="0" lvl="0" marL="0" rtl="0" algn="l">
+              <a:lnSpc>
+                <a:spcPct val="100000"/>
+              </a:lnSpc>
+              <a:spcBef>
+                <a:spcPts val="40"/>
+              </a:spcBef>
+              <a:spcAft>
+                <a:spcPts val="160"/>
+              </a:spcAft>
+              <a:buNone/>
+            </a:pPr>
+            <a:r>
+              <a:rPr lang="en-US" sz="1500" typeface="Consolas">
+                <a:solidFill>
                   <a:srgbClr val="DCDCAA"/>
                 </a:solidFill>
               </a:rPr>
-              <a:t>fetchResult = pc.fetchPage(</a:t>
-            </a:r>
-            <a:endParaRPr/>
-          </a:p>
-          <a:p>
-            <a:pPr indent="0" lvl="0" marL="0" rtl="0" algn="l">
-              <a:lnSpc>
-                <a:spcPct val="100000"/>
-              </a:lnSpc>
-              <a:spcBef>
-                <a:spcPts val="40"/>
-              </a:spcBef>
-              <a:spcAft>
-                <a:spcPts val="0"/>
-              </a:spcAft>
-              <a:buNone/>
-            </a:pPr>
-            <a:r>
-              <a:rPr lang="en-US" sz="1500" typeface="Consolas">
-                <a:solidFill>
-                  <a:srgbClr val="CE9178"/>
-                </a:solidFill>
-              </a:rPr>
-              <a:t>  dayIndex, 1);</a:t>
-            </a:r>
-            <a:endParaRPr/>
-          </a:p>
-          <a:p>
-            <a:pPr indent="0" lvl="0" marL="0" rtl="0" algn="l">
-              <a:lnSpc>
-                <a:spcPct val="100000"/>
-              </a:lnSpc>
-              <a:spcBef>
-                <a:spcPts val="40"/>
-              </a:spcBef>
-              <a:spcAft>
-                <a:spcPts val="0"/>
-              </a:spcAft>
-              <a:buNone/>
-            </a:pPr>
-            <a:r>
-              <a:rPr lang="en-US" sz="1500" typeface="Consolas">
-                <a:solidFill>
-                  <a:srgbClr val="D4D4D4"/>
-                </a:solidFill>
-              </a:rPr>
-              <a:t>deletedRows =</a:t>
-            </a:r>
-            <a:endParaRPr/>
-          </a:p>
-          <a:p>
-            <a:pPr indent="0" lvl="0" marL="0" rtl="0" algn="l">
-              <a:lnSpc>
-                <a:spcPct val="100000"/>
-              </a:lnSpc>
-              <a:spcBef>
-                <a:spcPts val="40"/>
-              </a:spcBef>
-              <a:spcAft>
-                <a:spcPts val="0"/>
-              </a:spcAft>
-              <a:buNone/>
-            </a:pPr>
-            <a:r>
-              <a:rPr lang="en-US" sz="1500" typeface="Consolas">
-                <a:solidFill>
-                  <a:srgbClr val="DCDCAA"/>
-                </a:solidFill>
-              </a:rPr>
-              <a:t>  fetchResult</a:t>
-            </a:r>
-            <a:endParaRPr/>
-          </a:p>
-          <a:p>
-            <a:pPr indent="0" lvl="0" marL="0" rtl="0" algn="l">
-              <a:lnSpc>
-                <a:spcPct val="100000"/>
-              </a:lnSpc>
-              <a:spcBef>
-                <a:spcPts val="40"/>
-              </a:spcBef>
-              <a:spcAft>
-                <a:spcPts val="160"/>
-              </a:spcAft>
-              <a:buNone/>
-            </a:pPr>
-            <a:r>
-              <a:rPr lang="en-US" sz="1500" typeface="Consolas">
-                <a:solidFill>
-                  <a:srgbClr val="CE9178"/>
-                </a:solidFill>
-              </a:rPr>
-              <a:t>    .getNumDeletedRecords();</a:t>
+              <a:t>      pageCursor.fetchPage(dayIndex, 1);</a:t>
             </a:r>
             <a:endParaRPr/>
           </a:p>
@@ -24464,7 +24463,7 @@
           </a:effectLst>
         </p:spPr>
         <p:txBody>
-          <a:bodyPr anchorCtr="0" anchor="t" bIns="160000" lIns="72000" rIns="72000" tIns="55000" wrap="square">
+          <a:bodyPr anchorCtr="0" anchor="t" bIns="160000" lIns="72000" rIns="72000" tIns="55000" wrap="none" horzOverflow="clip" vertOverflow="clip">
             <a:noAutofit/>
           </a:bodyPr>
           <a:lstStyle/>
@@ -24510,7 +24509,7 @@
                   <a:srgbClr val="569CD6"/>
                 </a:solidFill>
               </a:rPr>
-              <a:t>const detail = await</a:t>
+              <a:t>Database.CursorFetchResult</a:t>
             </a:r>
             <a:endParaRPr/>
           </a:p>
@@ -24530,10 +24529,33 @@
             <a:r>
               <a:rPr lang="en-US" sz="1500" typeface="Consolas">
                 <a:solidFill>
+                  <a:srgbClr val="D4D4D4"/>
+                </a:solidFill>
+              </a:rPr>
+              <a:t>    drilldownRecords =</a:t>
+            </a:r>
+            <a:endParaRPr/>
+          </a:p>
+          <a:p>
+            <a:pPr indent="0" lvl="0" marL="0" rtl="0" algn="l">
+              <a:lnSpc>
+                <a:spcPct val="100000"/>
+              </a:lnSpc>
+              <a:spcBef>
+                <a:spcPts val="40"/>
+              </a:spcBef>
+              <a:spcAft>
+                <a:spcPts val="0"/>
+              </a:spcAft>
+              <a:buNone/>
+            </a:pPr>
+            <a:r>
+              <a:rPr lang="en-US" sz="1500" typeface="Consolas">
+                <a:solidFill>
                   <a:srgbClr val="DCDCAA"/>
                 </a:solidFill>
               </a:rPr>
-              <a:t>  fetchDetailRange({</a:t>
+              <a:t>      pageCursor.fetchPage(</a:t>
             </a:r>
             <a:endParaRPr/>
           </a:p>
@@ -24546,7 +24568,7 @@
                 <a:spcPts val="40"/>
               </a:spcBef>
               <a:spcAft>
-                <a:spcPts val="0"/>
+                <a:spcPts val="160"/>
               </a:spcAft>
               <a:buNone/>
             </a:pPr>
@@ -24556,53 +24578,7 @@
                   <a:srgbClr val="CE9178"/>
                 </a:solidFill>
               </a:rPr>
-              <a:t>    product,</a:t>
-            </a:r>
-            <a:endParaRPr/>
-          </a:p>
-          <a:p>
-            <a:pPr indent="0" lvl="0" marL="0" rtl="0" algn="l">
-              <a:lnSpc>
-                <a:spcPct val="100000"/>
-              </a:lnSpc>
-              <a:spcBef>
-                <a:spcPts val="40"/>
-              </a:spcBef>
-              <a:spcAft>
-                <a:spcPts val="0"/>
-              </a:spcAft>
-              <a:buNone/>
-            </a:pPr>
-            <a:r>
-              <a:rPr lang="en-US" sz="1500" typeface="Consolas">
-                <a:solidFill>
-                  <a:srgbClr val="CE9178"/>
-                </a:solidFill>
-              </a:rPr>
-              <a:t>    startIndex, endIndex</a:t>
-            </a:r>
-            <a:endParaRPr/>
-          </a:p>
-          <a:p>
-            <a:pPr indent="0" lvl="0" marL="0" rtl="0" algn="l">
-              <a:lnSpc>
-                <a:spcPct val="100000"/>
-              </a:lnSpc>
-              <a:spcBef>
-                <a:spcPts val="40"/>
-              </a:spcBef>
-              <a:spcAft>
-                <a:spcPts val="160"/>
-              </a:spcAft>
-              <a:buNone/>
-            </a:pPr>
-            <a:r>
-              <a:rPr lang="en-US" sz="1500" typeface="Consolas">
-                <a:solidFill>
-                  <a:srgbClr val="DCDCAA"/>
-                </a:solidFill>
-              </a:rPr>
-              <a:t>  });</a:t>
+              <a:t>          drillStart, drillSize);</a:t>
             </a:r>
             <a:endParaRPr/>
           </a:p>

--- a/docs/presentation/lc26-apex-cursors.pptx
+++ b/docs/presentation/lc26-apex-cursors.pptx
@@ -16159,7 +16159,7 @@
                   <a:srgbClr val="6A9955"/>
                 </a:solidFill>
               </a:rPr>
-              <a:t>apex&gt;</a:t>
+              <a:t>soql&gt;</a:t>
             </a:r>
             <a:endParaRPr/>
           </a:p>
@@ -17898,7 +17898,7 @@
         </p:nvSpPr>
         <p:spPr>
           <a:xfrm>
-            <a:off x="338325" y="1446000"/>
+            <a:off x="338325" y="1346000"/>
             <a:ext cx="11484900" cy="3285000"/>
           </a:xfrm>
           <a:prstGeom prst="rect">
@@ -17936,7 +17936,7 @@
         </p:nvSpPr>
         <p:spPr>
           <a:xfrm>
-            <a:off x="338325" y="1446000"/>
+            <a:off x="338325" y="1346000"/>
             <a:ext cx="5972148" cy="420000"/>
           </a:xfrm>
           <a:prstGeom prst="rect">
@@ -17965,7 +17965,7 @@
         </p:nvSpPr>
         <p:spPr>
           <a:xfrm>
-            <a:off x="338325" y="1446000"/>
+            <a:off x="338325" y="1346000"/>
             <a:ext cx="5972148" cy="420000"/>
           </a:xfrm>
           <a:prstGeom prst="rect">
@@ -18014,7 +18014,7 @@
         </p:nvSpPr>
         <p:spPr>
           <a:xfrm>
-            <a:off x="6310473" y="1446000"/>
+            <a:off x="6310473" y="1346000"/>
             <a:ext cx="2756376" cy="420000"/>
           </a:xfrm>
           <a:prstGeom prst="rect">
@@ -18043,7 +18043,7 @@
         </p:nvSpPr>
         <p:spPr>
           <a:xfrm>
-            <a:off x="6310473" y="1446000"/>
+            <a:off x="6310473" y="1346000"/>
             <a:ext cx="2756376" cy="420000"/>
           </a:xfrm>
           <a:prstGeom prst="rect">
@@ -18092,7 +18092,7 @@
         </p:nvSpPr>
         <p:spPr>
           <a:xfrm>
-            <a:off x="9066849" y="1446000"/>
+            <a:off x="9066849" y="1346000"/>
             <a:ext cx="2756376" cy="420000"/>
           </a:xfrm>
           <a:prstGeom prst="rect">
@@ -18121,7 +18121,7 @@
         </p:nvSpPr>
         <p:spPr>
           <a:xfrm>
-            <a:off x="9066849" y="1446000"/>
+            <a:off x="9066849" y="1346000"/>
             <a:ext cx="2756376" cy="420000"/>
           </a:xfrm>
           <a:prstGeom prst="rect">
@@ -18170,7 +18170,7 @@
         </p:nvSpPr>
         <p:spPr>
           <a:xfrm>
-            <a:off x="338325" y="1866000"/>
+            <a:off x="338325" y="1766000"/>
             <a:ext cx="11484900" cy="285000"/>
           </a:xfrm>
           <a:prstGeom prst="rect">
@@ -18201,7 +18201,7 @@
         </p:nvSpPr>
         <p:spPr>
           <a:xfrm>
-            <a:off x="338325" y="1866000"/>
+            <a:off x="338325" y="1766000"/>
             <a:ext cx="11484900" cy="285000"/>
           </a:xfrm>
           <a:prstGeom prst="rect">
@@ -18250,7 +18250,7 @@
         </p:nvSpPr>
         <p:spPr>
           <a:xfrm>
-            <a:off x="338325" y="2151000"/>
+            <a:off x="338325" y="2051000"/>
             <a:ext cx="5972148" cy="335000"/>
           </a:xfrm>
           <a:prstGeom prst="rect">
@@ -18281,7 +18281,7 @@
         </p:nvSpPr>
         <p:spPr>
           <a:xfrm>
-            <a:off x="338325" y="2151000"/>
+            <a:off x="338325" y="2051000"/>
             <a:ext cx="5972148" cy="335000"/>
           </a:xfrm>
           <a:prstGeom prst="rect">
@@ -18330,7 +18330,7 @@
         </p:nvSpPr>
         <p:spPr>
           <a:xfrm>
-            <a:off x="6310473" y="2151000"/>
+            <a:off x="6310473" y="2051000"/>
             <a:ext cx="2756376" cy="335000"/>
           </a:xfrm>
           <a:prstGeom prst="rect">
@@ -18361,7 +18361,7 @@
         </p:nvSpPr>
         <p:spPr>
           <a:xfrm>
-            <a:off x="6310473" y="2151000"/>
+            <a:off x="6310473" y="2051000"/>
             <a:ext cx="2756376" cy="335000"/>
           </a:xfrm>
           <a:prstGeom prst="rect">
@@ -18410,7 +18410,7 @@
         </p:nvSpPr>
         <p:spPr>
           <a:xfrm>
-            <a:off x="9066849" y="2151000"/>
+            <a:off x="9066849" y="2051000"/>
             <a:ext cx="2756376" cy="335000"/>
           </a:xfrm>
           <a:prstGeom prst="rect">
@@ -18441,7 +18441,7 @@
         </p:nvSpPr>
         <p:spPr>
           <a:xfrm>
-            <a:off x="9066849" y="2151000"/>
+            <a:off x="9066849" y="2051000"/>
             <a:ext cx="2756376" cy="335000"/>
           </a:xfrm>
           <a:prstGeom prst="rect">
@@ -18490,7 +18490,7 @@
         </p:nvSpPr>
         <p:spPr>
           <a:xfrm>
-            <a:off x="338325" y="2486000"/>
+            <a:off x="338325" y="2386000"/>
             <a:ext cx="5972148" cy="335000"/>
           </a:xfrm>
           <a:prstGeom prst="rect">
@@ -18521,7 +18521,7 @@
         </p:nvSpPr>
         <p:spPr>
           <a:xfrm>
-            <a:off x="338325" y="2486000"/>
+            <a:off x="338325" y="2386000"/>
             <a:ext cx="5972148" cy="335000"/>
           </a:xfrm>
           <a:prstGeom prst="rect">
@@ -18570,7 +18570,7 @@
         </p:nvSpPr>
         <p:spPr>
           <a:xfrm>
-            <a:off x="6310473" y="2486000"/>
+            <a:off x="6310473" y="2386000"/>
             <a:ext cx="2756376" cy="335000"/>
           </a:xfrm>
           <a:prstGeom prst="rect">
@@ -18601,7 +18601,7 @@
         </p:nvSpPr>
         <p:spPr>
           <a:xfrm>
-            <a:off x="6310473" y="2486000"/>
+            <a:off x="6310473" y="2386000"/>
             <a:ext cx="2756376" cy="335000"/>
           </a:xfrm>
           <a:prstGeom prst="rect">
@@ -18650,7 +18650,7 @@
         </p:nvSpPr>
         <p:spPr>
           <a:xfrm>
-            <a:off x="9066849" y="2486000"/>
+            <a:off x="9066849" y="2386000"/>
             <a:ext cx="2756376" cy="335000"/>
           </a:xfrm>
           <a:prstGeom prst="rect">
@@ -18681,7 +18681,7 @@
         </p:nvSpPr>
         <p:spPr>
           <a:xfrm>
-            <a:off x="9066849" y="2486000"/>
+            <a:off x="9066849" y="2386000"/>
             <a:ext cx="2756376" cy="335000"/>
           </a:xfrm>
           <a:prstGeom prst="rect">
@@ -18730,7 +18730,7 @@
         </p:nvSpPr>
         <p:spPr>
           <a:xfrm>
-            <a:off x="338325" y="2821000"/>
+            <a:off x="338325" y="2721000"/>
             <a:ext cx="5972148" cy="335000"/>
           </a:xfrm>
           <a:prstGeom prst="rect">
@@ -18761,7 +18761,7 @@
         </p:nvSpPr>
         <p:spPr>
           <a:xfrm>
-            <a:off x="338325" y="2821000"/>
+            <a:off x="338325" y="2721000"/>
             <a:ext cx="5972148" cy="335000"/>
           </a:xfrm>
           <a:prstGeom prst="rect">
@@ -18810,7 +18810,7 @@
         </p:nvSpPr>
         <p:spPr>
           <a:xfrm>
-            <a:off x="6310473" y="2821000"/>
+            <a:off x="6310473" y="2721000"/>
             <a:ext cx="2756376" cy="335000"/>
           </a:xfrm>
           <a:prstGeom prst="rect">
@@ -18841,7 +18841,7 @@
         </p:nvSpPr>
         <p:spPr>
           <a:xfrm>
-            <a:off x="6310473" y="2821000"/>
+            <a:off x="6310473" y="2721000"/>
             <a:ext cx="2756376" cy="335000"/>
           </a:xfrm>
           <a:prstGeom prst="rect">
@@ -18890,7 +18890,7 @@
         </p:nvSpPr>
         <p:spPr>
           <a:xfrm>
-            <a:off x="9066849" y="2821000"/>
+            <a:off x="9066849" y="2721000"/>
             <a:ext cx="2756376" cy="335000"/>
           </a:xfrm>
           <a:prstGeom prst="rect">
@@ -18921,7 +18921,7 @@
         </p:nvSpPr>
         <p:spPr>
           <a:xfrm>
-            <a:off x="9066849" y="2821000"/>
+            <a:off x="9066849" y="2721000"/>
             <a:ext cx="2756376" cy="335000"/>
           </a:xfrm>
           <a:prstGeom prst="rect">
@@ -18970,7 +18970,7 @@
         </p:nvSpPr>
         <p:spPr>
           <a:xfrm>
-            <a:off x="338325" y="3156000"/>
+            <a:off x="338325" y="3056000"/>
             <a:ext cx="11484900" cy="285000"/>
           </a:xfrm>
           <a:prstGeom prst="rect">
@@ -19001,7 +19001,7 @@
         </p:nvSpPr>
         <p:spPr>
           <a:xfrm>
-            <a:off x="338325" y="3156000"/>
+            <a:off x="338325" y="3056000"/>
             <a:ext cx="11484900" cy="285000"/>
           </a:xfrm>
           <a:prstGeom prst="rect">
@@ -19050,7 +19050,7 @@
         </p:nvSpPr>
         <p:spPr>
           <a:xfrm>
-            <a:off x="338325" y="3441000"/>
+            <a:off x="338325" y="3341000"/>
             <a:ext cx="5972148" cy="335000"/>
           </a:xfrm>
           <a:prstGeom prst="rect">
@@ -19081,7 +19081,7 @@
         </p:nvSpPr>
         <p:spPr>
           <a:xfrm>
-            <a:off x="338325" y="3441000"/>
+            <a:off x="338325" y="3341000"/>
             <a:ext cx="5972148" cy="335000"/>
           </a:xfrm>
           <a:prstGeom prst="rect">
@@ -19130,7 +19130,7 @@
         </p:nvSpPr>
         <p:spPr>
           <a:xfrm>
-            <a:off x="6310473" y="3441000"/>
+            <a:off x="6310473" y="3341000"/>
             <a:ext cx="2756376" cy="335000"/>
           </a:xfrm>
           <a:prstGeom prst="rect">
@@ -19161,7 +19161,7 @@
         </p:nvSpPr>
         <p:spPr>
           <a:xfrm>
-            <a:off x="6310473" y="3441000"/>
+            <a:off x="6310473" y="3341000"/>
             <a:ext cx="2756376" cy="335000"/>
           </a:xfrm>
           <a:prstGeom prst="rect">
@@ -19210,7 +19210,7 @@
         </p:nvSpPr>
         <p:spPr>
           <a:xfrm>
-            <a:off x="9066849" y="3441000"/>
+            <a:off x="9066849" y="3341000"/>
             <a:ext cx="2756376" cy="335000"/>
           </a:xfrm>
           <a:prstGeom prst="rect">
@@ -19241,7 +19241,7 @@
         </p:nvSpPr>
         <p:spPr>
           <a:xfrm>
-            <a:off x="9066849" y="3441000"/>
+            <a:off x="9066849" y="3341000"/>
             <a:ext cx="2756376" cy="335000"/>
           </a:xfrm>
           <a:prstGeom prst="rect">
@@ -19290,7 +19290,7 @@
         </p:nvSpPr>
         <p:spPr>
           <a:xfrm>
-            <a:off x="338325" y="3776000"/>
+            <a:off x="338325" y="3676000"/>
             <a:ext cx="11484900" cy="285000"/>
           </a:xfrm>
           <a:prstGeom prst="rect">
@@ -19321,7 +19321,7 @@
         </p:nvSpPr>
         <p:spPr>
           <a:xfrm>
-            <a:off x="338325" y="3776000"/>
+            <a:off x="338325" y="3676000"/>
             <a:ext cx="11484900" cy="285000"/>
           </a:xfrm>
           <a:prstGeom prst="rect">
@@ -19370,7 +19370,7 @@
         </p:nvSpPr>
         <p:spPr>
           <a:xfrm>
-            <a:off x="338325" y="4061000"/>
+            <a:off x="338325" y="3961000"/>
             <a:ext cx="5972148" cy="335000"/>
           </a:xfrm>
           <a:prstGeom prst="rect">
@@ -19401,7 +19401,7 @@
         </p:nvSpPr>
         <p:spPr>
           <a:xfrm>
-            <a:off x="338325" y="4061000"/>
+            <a:off x="338325" y="3961000"/>
             <a:ext cx="5972148" cy="335000"/>
           </a:xfrm>
           <a:prstGeom prst="rect">
@@ -19450,7 +19450,7 @@
         </p:nvSpPr>
         <p:spPr>
           <a:xfrm>
-            <a:off x="6310473" y="4061000"/>
+            <a:off x="6310473" y="3961000"/>
             <a:ext cx="2756376" cy="335000"/>
           </a:xfrm>
           <a:prstGeom prst="rect">
@@ -19481,7 +19481,7 @@
         </p:nvSpPr>
         <p:spPr>
           <a:xfrm>
-            <a:off x="6310473" y="4061000"/>
+            <a:off x="6310473" y="3961000"/>
             <a:ext cx="2756376" cy="335000"/>
           </a:xfrm>
           <a:prstGeom prst="rect">
@@ -19530,7 +19530,7 @@
         </p:nvSpPr>
         <p:spPr>
           <a:xfrm>
-            <a:off x="9066849" y="4061000"/>
+            <a:off x="9066849" y="3961000"/>
             <a:ext cx="2756376" cy="335000"/>
           </a:xfrm>
           <a:prstGeom prst="rect">
@@ -19561,7 +19561,7 @@
         </p:nvSpPr>
         <p:spPr>
           <a:xfrm>
-            <a:off x="9066849" y="4061000"/>
+            <a:off x="9066849" y="3961000"/>
             <a:ext cx="2756376" cy="335000"/>
           </a:xfrm>
           <a:prstGeom prst="rect">
@@ -19610,7 +19610,7 @@
         </p:nvSpPr>
         <p:spPr>
           <a:xfrm>
-            <a:off x="338325" y="4396000"/>
+            <a:off x="338325" y="4296000"/>
             <a:ext cx="5972148" cy="335000"/>
           </a:xfrm>
           <a:prstGeom prst="rect">
@@ -19641,7 +19641,7 @@
         </p:nvSpPr>
         <p:spPr>
           <a:xfrm>
-            <a:off x="338325" y="4396000"/>
+            <a:off x="338325" y="4296000"/>
             <a:ext cx="5972148" cy="335000"/>
           </a:xfrm>
           <a:prstGeom prst="rect">
@@ -19690,7 +19690,7 @@
         </p:nvSpPr>
         <p:spPr>
           <a:xfrm>
-            <a:off x="6310473" y="4396000"/>
+            <a:off x="6310473" y="4296000"/>
             <a:ext cx="2756376" cy="335000"/>
           </a:xfrm>
           <a:prstGeom prst="rect">
@@ -19721,7 +19721,7 @@
         </p:nvSpPr>
         <p:spPr>
           <a:xfrm>
-            <a:off x="6310473" y="4396000"/>
+            <a:off x="6310473" y="4296000"/>
             <a:ext cx="2756376" cy="335000"/>
           </a:xfrm>
           <a:prstGeom prst="rect">
@@ -19770,7 +19770,7 @@
         </p:nvSpPr>
         <p:spPr>
           <a:xfrm>
-            <a:off x="9066849" y="4396000"/>
+            <a:off x="9066849" y="4296000"/>
             <a:ext cx="2756376" cy="335000"/>
           </a:xfrm>
           <a:prstGeom prst="rect">
@@ -19801,7 +19801,7 @@
         </p:nvSpPr>
         <p:spPr>
           <a:xfrm>
-            <a:off x="9066849" y="4396000"/>
+            <a:off x="9066849" y="4296000"/>
             <a:ext cx="2756376" cy="335000"/>
           </a:xfrm>
           <a:prstGeom prst="rect">
@@ -19850,8 +19850,8 @@
         </p:nvSpPr>
         <p:spPr>
           <a:xfrm>
-            <a:off x="338325" y="4831000"/>
-            <a:ext cx="11484900" cy="1450000"/>
+            <a:off x="338325" y="4731000"/>
+            <a:ext cx="11484900" cy="1650000"/>
           </a:xfrm>
           <a:prstGeom prst="roundRect">
             <a:avLst>
@@ -19932,7 +19932,7 @@
                 <a:spcPts val="150"/>
               </a:spcBef>
               <a:spcAft>
-                <a:spcPts val="100"/>
+                <a:spcPts val="0"/>
               </a:spcAft>
               <a:buClr>
                 <a:srgbClr val="891019"/>
@@ -19943,6 +19943,29 @@
             <a:r>
               <a:rPr lang="en-US" sz="1650"/>
               <a:t>Cursors expire like API query cursors — see API Query Cursor Limits in Salesforce Help.</a:t>
+            </a:r>
+            <a:endParaRPr/>
+          </a:p>
+          <a:p>
+            <a:pPr indent="-285750" lvl="0" marL="457200" rtl="0" algn="l">
+              <a:lnSpc>
+                <a:spcPct val="112000"/>
+              </a:lnSpc>
+              <a:spcBef>
+                <a:spcPts val="150"/>
+              </a:spcBef>
+              <a:spcAft>
+                <a:spcPts val="100"/>
+              </a:spcAft>
+              <a:buClr>
+                <a:srgbClr val="891019"/>
+              </a:buClr>
+              <a:buSzPts val="1500"/>
+              <a:buChar char="•"/>
+            </a:pPr>
+            <a:r>
+              <a:rPr lang="en-US" sz="1650"/>
+              <a:t>Aggregate, subselect and virtual object queries are not supported.</a:t>
             </a:r>
             <a:endParaRPr/>
           </a:p>
@@ -23729,7 +23752,7 @@
             </a:pPr>
             <a:r>
               <a:rPr lang="en-US" sz="1800"/>
-              <a:t>Optional Cache.Session keeps the pagination cursor across user session</a:t>
+              <a:t>Cache.Session keeps the pagination cursor between requests; session cache and cursors are per user</a:t>
             </a:r>
             <a:endParaRPr/>
           </a:p>
